--- a/project_presentation_template.pptx
+++ b/project_presentation_template.pptx
@@ -3295,6 +3295,66 @@
           </a:p>
         </p:txBody>
       </p:sp>
+      <p:pic>
+        <p:nvPicPr>
+          <p:cNvPr id="27" name="Picture 26" descr="A blue and white graph&#10;&#10;AI-generated content may be incorrect.">
+            <a:extLst>
+              <a:ext uri="{FF2B5EF4-FFF2-40B4-BE49-F238E27FC236}">
+                <a16:creationId xmlns:a16="http://schemas.microsoft.com/office/drawing/2014/main" id="{6BDA89F9-9C4D-3075-1F97-799E2877CF05}"/>
+              </a:ext>
+            </a:extLst>
+          </p:cNvPr>
+          <p:cNvPicPr>
+            <a:picLocks noChangeAspect="1"/>
+          </p:cNvPicPr>
+          <p:nvPr/>
+        </p:nvPicPr>
+        <p:blipFill>
+          <a:blip r:embed="rId3"/>
+          <a:stretch>
+            <a:fillRect/>
+          </a:stretch>
+        </p:blipFill>
+        <p:spPr>
+          <a:xfrm>
+            <a:off x="1143000" y="1109788"/>
+            <a:ext cx="2565088" cy="2565088"/>
+          </a:xfrm>
+          <a:prstGeom prst="rect">
+            <a:avLst/>
+          </a:prstGeom>
+        </p:spPr>
+      </p:pic>
+      <p:pic>
+        <p:nvPicPr>
+          <p:cNvPr id="29" name="Picture 28" descr="A graph of a curve&#10;&#10;AI-generated content may be incorrect.">
+            <a:extLst>
+              <a:ext uri="{FF2B5EF4-FFF2-40B4-BE49-F238E27FC236}">
+                <a16:creationId xmlns:a16="http://schemas.microsoft.com/office/drawing/2014/main" id="{44840C6A-6B53-E391-2768-9B4DFF4C21A4}"/>
+              </a:ext>
+            </a:extLst>
+          </p:cNvPr>
+          <p:cNvPicPr>
+            <a:picLocks noChangeAspect="1"/>
+          </p:cNvPicPr>
+          <p:nvPr/>
+        </p:nvPicPr>
+        <p:blipFill>
+          <a:blip r:embed="rId4"/>
+          <a:stretch>
+            <a:fillRect/>
+          </a:stretch>
+        </p:blipFill>
+        <p:spPr>
+          <a:xfrm>
+            <a:off x="5045964" y="1035101"/>
+            <a:ext cx="3349752" cy="2871216"/>
+          </a:xfrm>
+          <a:prstGeom prst="rect">
+            <a:avLst/>
+          </a:prstGeom>
+        </p:spPr>
+      </p:pic>
     </p:spTree>
   </p:cSld>
   <p:clrMapOvr>
@@ -3655,126 +3715,6 @@
       </p:sp>
       <p:sp>
         <p:nvSpPr>
-          <p:cNvPr id="5" name="Shape 3"/>
-          <p:cNvSpPr/>
-          <p:nvPr/>
-        </p:nvSpPr>
-        <p:spPr>
-          <a:xfrm>
-            <a:off x="411480" y="1170432"/>
-            <a:ext cx="4069080" cy="2670048"/>
-          </a:xfrm>
-          <a:prstGeom prst="roundRect">
-            <a:avLst>
-              <a:gd name="adj" fmla="val 2740"/>
-            </a:avLst>
-          </a:prstGeom>
-          <a:solidFill>
-            <a:srgbClr val="F0F4FA"/>
-          </a:solidFill>
-          <a:ln w="15240">
-            <a:solidFill>
-              <a:srgbClr val="CBD5E1"/>
-            </a:solidFill>
-            <a:prstDash val="dash"/>
-          </a:ln>
-        </p:spPr>
-        <p:txBody>
-          <a:bodyPr/>
-          <a:lstStyle/>
-          <a:p>
-            <a:endParaRPr lang="it-IT"/>
-          </a:p>
-        </p:txBody>
-      </p:sp>
-      <p:sp>
-        <p:nvSpPr>
-          <p:cNvPr id="6" name="Text 4"/>
-          <p:cNvSpPr/>
-          <p:nvPr/>
-        </p:nvSpPr>
-        <p:spPr>
-          <a:xfrm>
-            <a:off x="411480" y="1971446"/>
-            <a:ext cx="4069080" cy="1068019"/>
-          </a:xfrm>
-          <a:prstGeom prst="rect">
-            <a:avLst/>
-          </a:prstGeom>
-          <a:noFill/>
-          <a:ln/>
-        </p:spPr>
-        <p:txBody>
-          <a:bodyPr wrap="square" lIns="0" tIns="0" rIns="0" bIns="0" rtlCol="0" anchor="ctr"/>
-          <a:lstStyle/>
-          <a:p>
-            <a:pPr marL="0" indent="0" algn="ctr">
-              <a:buNone/>
-            </a:pPr>
-            <a:r>
-              <a:rPr lang="en-US" sz="1100" i="1" dirty="0">
-                <a:solidFill>
-                  <a:srgbClr val="7A8FA6"/>
-                </a:solidFill>
-              </a:rPr>
-              <a:t>[ YOUR FIGURE HERE ]</a:t>
-            </a:r>
-            <a:endParaRPr lang="en-US" sz="1100" dirty="0"/>
-          </a:p>
-        </p:txBody>
-      </p:sp>
-      <p:sp>
-        <p:nvSpPr>
-          <p:cNvPr id="7" name="Text 5"/>
-          <p:cNvSpPr/>
-          <p:nvPr/>
-        </p:nvSpPr>
-        <p:spPr>
-          <a:xfrm>
-            <a:off x="411480" y="2825862"/>
-            <a:ext cx="4069080" cy="854415"/>
-          </a:xfrm>
-          <a:prstGeom prst="rect">
-            <a:avLst/>
-          </a:prstGeom>
-          <a:noFill/>
-          <a:ln/>
-        </p:spPr>
-        <p:txBody>
-          <a:bodyPr wrap="square" lIns="0" tIns="0" rIns="0" bIns="0" rtlCol="0" anchor="t"/>
-          <a:lstStyle/>
-          <a:p>
-            <a:pPr marL="0" indent="0" algn="ctr">
-              <a:buNone/>
-            </a:pPr>
-            <a:r>
-              <a:rPr lang="en-US" sz="850" dirty="0">
-                <a:solidFill>
-                  <a:srgbClr val="7A8FA6"/>
-                </a:solidFill>
-              </a:rPr>
-              <a:t>Global explainability figure</a:t>
-            </a:r>
-            <a:endParaRPr lang="en-US" sz="850" dirty="0"/>
-          </a:p>
-          <a:p>
-            <a:pPr marL="0" indent="0" algn="ctr">
-              <a:buNone/>
-            </a:pPr>
-            <a:r>
-              <a:rPr lang="en-US" sz="850" dirty="0">
-                <a:solidFill>
-                  <a:srgbClr val="7A8FA6"/>
-                </a:solidFill>
-              </a:rPr>
-              <a:t>e.g., Mean |SHAP| bar chart or permutation importance ranking</a:t>
-            </a:r>
-            <a:endParaRPr lang="en-US" sz="850" dirty="0"/>
-          </a:p>
-        </p:txBody>
-      </p:sp>
-      <p:sp>
-        <p:nvSpPr>
           <p:cNvPr id="8" name="Text 6"/>
           <p:cNvSpPr/>
           <p:nvPr/>
@@ -3841,6 +3781,17 @@
               <a:buChar char="•"/>
             </a:pPr>
             <a:r>
+              <a:rPr lang="en-US" sz="1100" b="1" dirty="0">
+                <a:solidFill>
+                  <a:srgbClr val="1E293B"/>
+                </a:solidFill>
+                <a:latin typeface="Calibri" pitchFamily="34" charset="0"/>
+                <a:ea typeface="Calibri" pitchFamily="34" charset="-122"/>
+                <a:cs typeface="Calibri" pitchFamily="34" charset="-120"/>
+              </a:rPr>
+              <a:t>Technique</a:t>
+            </a:r>
+            <a:r>
               <a:rPr lang="en-US" sz="1100" dirty="0">
                 <a:solidFill>
                   <a:srgbClr val="1E293B"/>
@@ -3849,7 +3800,7 @@
                 <a:ea typeface="Calibri" pitchFamily="34" charset="-122"/>
                 <a:cs typeface="Calibri" pitchFamily="34" charset="-120"/>
               </a:rPr>
-              <a:t>Technique: SHAP. Each feature's value shows its average marginal contribution to the prediction across the full test set. Appropriate for </a:t>
+              <a:t>: SHAP </a:t>
             </a:r>
             <a:r>
               <a:rPr lang="en-US" sz="1100" dirty="0" err="1">
@@ -3860,7 +3811,7 @@
                 <a:ea typeface="Calibri" pitchFamily="34" charset="-122"/>
                 <a:cs typeface="Calibri" pitchFamily="34" charset="-120"/>
               </a:rPr>
-              <a:t>LightGBM</a:t>
+              <a:t>beeswarm</a:t>
             </a:r>
             <a:r>
               <a:rPr lang="en-US" sz="1100" dirty="0">
@@ -3871,7 +3822,7 @@
                 <a:ea typeface="Calibri" pitchFamily="34" charset="-122"/>
                 <a:cs typeface="Calibri" pitchFamily="34" charset="-120"/>
               </a:rPr>
-              <a:t> as it handles non-linear interactions correctly.</a:t>
+              <a:t> — each dot is one test sample; color = feature value (red high, blue low); x-axis = impact direction (positive -&gt; Real, negative -&gt; Fake)</a:t>
             </a:r>
           </a:p>
           <a:p>
@@ -3891,7 +3842,7 @@
                 <a:ea typeface="Calibri" pitchFamily="34" charset="-122"/>
                 <a:cs typeface="Calibri" pitchFamily="34" charset="-120"/>
               </a:rPr>
-              <a:t>Exclamation mark density and title uppercase ratio are the strongest drivers — both sensationalism signals confirmed by EDA. Semantic tokens like "</a:t>
+              <a:t>Strongest signal: “</a:t>
             </a:r>
             <a:r>
               <a:rPr lang="en-US" sz="1100" dirty="0" err="1">
@@ -3913,7 +3864,7 @@
                 <a:ea typeface="Calibri" pitchFamily="34" charset="-122"/>
                 <a:cs typeface="Calibri" pitchFamily="34" charset="-120"/>
               </a:rPr>
-              <a:t>" push toward fake; "</a:t>
+              <a:t>” present -&gt; Fake; “</a:t>
             </a:r>
             <a:r>
               <a:rPr lang="en-US" sz="1100" dirty="0" err="1">
@@ -3935,7 +3886,7 @@
                 <a:ea typeface="Calibri" pitchFamily="34" charset="-122"/>
                 <a:cs typeface="Calibri" pitchFamily="34" charset="-120"/>
               </a:rPr>
-              <a:t>" and "</a:t>
+              <a:t>” / “</a:t>
             </a:r>
             <a:r>
               <a:rPr lang="en-US" sz="1100" dirty="0" err="1">
@@ -3946,7 +3897,7 @@
                 <a:ea typeface="Calibri" pitchFamily="34" charset="-122"/>
                 <a:cs typeface="Calibri" pitchFamily="34" charset="-120"/>
               </a:rPr>
-              <a:t>york</a:t>
+              <a:t>washington</a:t>
             </a:r>
             <a:r>
               <a:rPr lang="en-US" sz="1100" dirty="0">
@@ -3957,7 +3908,29 @@
                 <a:ea typeface="Calibri" pitchFamily="34" charset="-122"/>
                 <a:cs typeface="Calibri" pitchFamily="34" charset="-120"/>
               </a:rPr>
-              <a:t>" anchor real news predictions.</a:t>
+              <a:t> </a:t>
+            </a:r>
+            <a:r>
+              <a:rPr lang="en-US" sz="1100" dirty="0" err="1">
+                <a:solidFill>
+                  <a:srgbClr val="1E293B"/>
+                </a:solidFill>
+                <a:latin typeface="Calibri" pitchFamily="34" charset="0"/>
+                <a:ea typeface="Calibri" pitchFamily="34" charset="-122"/>
+                <a:cs typeface="Calibri" pitchFamily="34" charset="-120"/>
+              </a:rPr>
+              <a:t>reuters</a:t>
+            </a:r>
+            <a:r>
+              <a:rPr lang="en-US" sz="1100" dirty="0">
+                <a:solidFill>
+                  <a:srgbClr val="1E293B"/>
+                </a:solidFill>
+                <a:latin typeface="Calibri" pitchFamily="34" charset="0"/>
+                <a:ea typeface="Calibri" pitchFamily="34" charset="-122"/>
+                <a:cs typeface="Calibri" pitchFamily="34" charset="-120"/>
+              </a:rPr>
+              <a:t>” absent -&gt; Real. The model learned to recognize partisan vs. institutional sources without explicit supervision.</a:t>
             </a:r>
           </a:p>
           <a:p>
@@ -3969,17 +3942,29 @@
               <a:buChar char="•"/>
             </a:pPr>
             <a:r>
-              <a:rPr lang="en-US" sz="1100" dirty="0">
-                <a:solidFill>
-                  <a:srgbClr val="1E293B"/>
-                </a:solidFill>
-                <a:latin typeface="Calibri" pitchFamily="34" charset="0"/>
-                <a:ea typeface="Calibri" pitchFamily="34" charset="-122"/>
-                <a:cs typeface="Calibri" pitchFamily="34" charset="-120"/>
-              </a:rPr>
-              <a:t>[Any surprising or counterintuitive finding?]</a:t>
-            </a:r>
-            <a:endParaRPr lang="en-US" sz="1100" dirty="0"/>
+              <a:rPr lang="en-US" sz="1100" b="1" dirty="0"/>
+              <a:t>Stylometric features are counterintuitive:</a:t>
+            </a:r>
+            <a:r>
+              <a:rPr lang="en-US" sz="1100" dirty="0"/>
+              <a:t> high “</a:t>
+            </a:r>
+            <a:r>
+              <a:rPr lang="en-US" sz="1100" dirty="0" err="1"/>
+              <a:t>exclamation_mark_density</a:t>
+            </a:r>
+            <a:r>
+              <a:rPr lang="en-US" sz="1100" dirty="0"/>
+              <a:t>” and “</a:t>
+            </a:r>
+            <a:r>
+              <a:rPr lang="en-US" sz="1100" dirty="0" err="1"/>
+              <a:t>question_mark_density</a:t>
+            </a:r>
+            <a:r>
+              <a:rPr lang="en-US" sz="1100" dirty="0"/>
+              <a:t>” push toward Real — contrary to the EDA hypothesis.</a:t>
+            </a:r>
           </a:p>
           <a:p>
             <a:pPr marL="342900" indent="-342900">
@@ -4003,152 +3988,36 @@
           </a:p>
         </p:txBody>
       </p:sp>
-      <p:sp>
-        <p:nvSpPr>
-          <p:cNvPr id="10" name="Shape 8"/>
-          <p:cNvSpPr/>
-          <p:nvPr/>
-        </p:nvSpPr>
-        <p:spPr>
-          <a:xfrm>
-            <a:off x="411480" y="3931920"/>
-            <a:ext cx="8321040" cy="594360"/>
-          </a:xfrm>
-          <a:prstGeom prst="roundRect">
-            <a:avLst>
-              <a:gd name="adj" fmla="val 12308"/>
-            </a:avLst>
-          </a:prstGeom>
-          <a:solidFill>
-            <a:srgbClr val="E8F4FD"/>
-          </a:solidFill>
-          <a:ln w="12700">
-            <a:solidFill>
-              <a:srgbClr val="93C5E0"/>
-            </a:solidFill>
-            <a:prstDash val="solid"/>
-          </a:ln>
-        </p:spPr>
-        <p:txBody>
-          <a:bodyPr/>
-          <a:lstStyle/>
-          <a:p>
-            <a:endParaRPr lang="it-IT"/>
-          </a:p>
-        </p:txBody>
-      </p:sp>
-      <p:sp>
-        <p:nvSpPr>
-          <p:cNvPr id="11" name="Text 9"/>
-          <p:cNvSpPr/>
-          <p:nvPr/>
-        </p:nvSpPr>
-        <p:spPr>
-          <a:xfrm>
-            <a:off x="539496" y="4005072"/>
-            <a:ext cx="8065008" cy="448056"/>
-          </a:xfrm>
-          <a:prstGeom prst="rect">
-            <a:avLst/>
-          </a:prstGeom>
-          <a:noFill/>
-          <a:ln/>
-        </p:spPr>
-        <p:txBody>
-          <a:bodyPr wrap="square" lIns="0" tIns="0" rIns="0" bIns="0" rtlCol="0" anchor="t"/>
-          <a:lstStyle/>
-          <a:p>
-            <a:pPr marL="0" indent="0">
-              <a:buNone/>
-            </a:pPr>
-            <a:r>
-              <a:rPr lang="en-US" sz="950" i="1" dirty="0">
-                <a:solidFill>
-                  <a:srgbClr val="1E5A82"/>
-                </a:solidFill>
-                <a:latin typeface="Calibri" pitchFamily="34" charset="0"/>
-                <a:ea typeface="Calibri" pitchFamily="34" charset="-122"/>
-                <a:cs typeface="Calibri" pitchFamily="34" charset="-120"/>
-              </a:rPr>
-              <a:t>Connect each explanation to the application domain. A SHAP plot is useless without interpreting what the top features mean in practice.</a:t>
-            </a:r>
-            <a:endParaRPr lang="en-US" sz="950" dirty="0"/>
-          </a:p>
-        </p:txBody>
-      </p:sp>
-      <p:sp>
-        <p:nvSpPr>
-          <p:cNvPr id="12" name="Shape 10"/>
-          <p:cNvSpPr/>
-          <p:nvPr/>
-        </p:nvSpPr>
-        <p:spPr>
-          <a:xfrm>
-            <a:off x="411480" y="4572000"/>
-            <a:ext cx="8321040" cy="457200"/>
-          </a:xfrm>
-          <a:prstGeom prst="roundRect">
-            <a:avLst>
-              <a:gd name="adj" fmla="val 16000"/>
-            </a:avLst>
-          </a:prstGeom>
-          <a:solidFill>
-            <a:srgbClr val="E8F4FD"/>
-          </a:solidFill>
-          <a:ln w="12700">
-            <a:solidFill>
-              <a:srgbClr val="93C5E0"/>
-            </a:solidFill>
-            <a:prstDash val="solid"/>
-          </a:ln>
-        </p:spPr>
-        <p:txBody>
-          <a:bodyPr/>
-          <a:lstStyle/>
-          <a:p>
-            <a:endParaRPr lang="it-IT"/>
-          </a:p>
-        </p:txBody>
-      </p:sp>
-      <p:sp>
-        <p:nvSpPr>
-          <p:cNvPr id="13" name="Text 11"/>
-          <p:cNvSpPr/>
-          <p:nvPr/>
-        </p:nvSpPr>
-        <p:spPr>
-          <a:xfrm>
-            <a:off x="539496" y="4645152"/>
-            <a:ext cx="8065008" cy="310896"/>
-          </a:xfrm>
-          <a:prstGeom prst="rect">
-            <a:avLst/>
-          </a:prstGeom>
-          <a:noFill/>
-          <a:ln/>
-        </p:spPr>
-        <p:txBody>
-          <a:bodyPr wrap="square" lIns="0" tIns="0" rIns="0" bIns="0" rtlCol="0" anchor="t"/>
-          <a:lstStyle/>
-          <a:p>
-            <a:pPr marL="0" indent="0">
-              <a:buNone/>
-            </a:pPr>
-            <a:r>
-              <a:rPr lang="en-US" sz="950" i="1" dirty="0">
-                <a:solidFill>
-                  <a:srgbClr val="1E5A82"/>
-                </a:solidFill>
-                <a:latin typeface="Calibri" pitchFamily="34" charset="0"/>
-                <a:ea typeface="Calibri" pitchFamily="34" charset="-122"/>
-                <a:cs typeface="Calibri" pitchFamily="34" charset="-120"/>
-              </a:rPr>
-              <a:t>Global techniques seen in class: permutation importance, mean |SHAP| (beeswarm), partial dependence plots, SAGE values.</a:t>
-            </a:r>
-            <a:endParaRPr lang="en-US" sz="950" dirty="0"/>
-          </a:p>
-        </p:txBody>
-      </p:sp>
+      <p:pic>
+        <p:nvPicPr>
+          <p:cNvPr id="15" name="Picture 14" descr="A graph with blue and pink lines&#10;&#10;AI-generated content may be incorrect.">
+            <a:extLst>
+              <a:ext uri="{FF2B5EF4-FFF2-40B4-BE49-F238E27FC236}">
+                <a16:creationId xmlns:a16="http://schemas.microsoft.com/office/drawing/2014/main" id="{2E852A9B-2B3A-28D5-2F1F-4614E6C53D95}"/>
+              </a:ext>
+            </a:extLst>
+          </p:cNvPr>
+          <p:cNvPicPr>
+            <a:picLocks noChangeAspect="1"/>
+          </p:cNvPicPr>
+          <p:nvPr/>
+        </p:nvPicPr>
+        <p:blipFill>
+          <a:blip r:embed="rId3"/>
+          <a:stretch>
+            <a:fillRect/>
+          </a:stretch>
+        </p:blipFill>
+        <p:spPr>
+          <a:xfrm>
+            <a:off x="959670" y="1131830"/>
+            <a:ext cx="3168194" cy="3807236"/>
+          </a:xfrm>
+          <a:prstGeom prst="rect">
+            <a:avLst/>
+          </a:prstGeom>
+        </p:spPr>
+      </p:pic>
     </p:spTree>
   </p:cSld>
   <p:clrMapOvr>
@@ -4293,140 +4162,6 @@
       </p:sp>
       <p:sp>
         <p:nvSpPr>
-          <p:cNvPr id="5" name="Shape 3"/>
-          <p:cNvSpPr/>
-          <p:nvPr/>
-        </p:nvSpPr>
-        <p:spPr>
-          <a:xfrm>
-            <a:off x="411480" y="1170432"/>
-            <a:ext cx="4069080" cy="2670048"/>
-          </a:xfrm>
-          <a:prstGeom prst="roundRect">
-            <a:avLst>
-              <a:gd name="adj" fmla="val 2740"/>
-            </a:avLst>
-          </a:prstGeom>
-          <a:solidFill>
-            <a:srgbClr val="F0F4FA"/>
-          </a:solidFill>
-          <a:ln w="15240">
-            <a:solidFill>
-              <a:srgbClr val="CBD5E1"/>
-            </a:solidFill>
-            <a:prstDash val="dash"/>
-          </a:ln>
-        </p:spPr>
-        <p:txBody>
-          <a:bodyPr/>
-          <a:lstStyle/>
-          <a:p>
-            <a:endParaRPr lang="it-IT"/>
-          </a:p>
-        </p:txBody>
-      </p:sp>
-      <p:sp>
-        <p:nvSpPr>
-          <p:cNvPr id="6" name="Text 4"/>
-          <p:cNvSpPr/>
-          <p:nvPr/>
-        </p:nvSpPr>
-        <p:spPr>
-          <a:xfrm>
-            <a:off x="411480" y="1971446"/>
-            <a:ext cx="4069080" cy="1068019"/>
-          </a:xfrm>
-          <a:prstGeom prst="rect">
-            <a:avLst/>
-          </a:prstGeom>
-          <a:noFill/>
-          <a:ln/>
-        </p:spPr>
-        <p:txBody>
-          <a:bodyPr wrap="square" lIns="0" tIns="0" rIns="0" bIns="0" rtlCol="0" anchor="ctr"/>
-          <a:lstStyle/>
-          <a:p>
-            <a:pPr marL="0" indent="0" algn="ctr">
-              <a:buNone/>
-            </a:pPr>
-            <a:r>
-              <a:rPr lang="en-US" sz="1100" i="1" dirty="0">
-                <a:solidFill>
-                  <a:srgbClr val="7A8FA6"/>
-                </a:solidFill>
-              </a:rPr>
-              <a:t>[ YOUR FIGURE HERE ]</a:t>
-            </a:r>
-            <a:endParaRPr lang="en-US" sz="1100" dirty="0"/>
-          </a:p>
-        </p:txBody>
-      </p:sp>
-      <p:sp>
-        <p:nvSpPr>
-          <p:cNvPr id="7" name="Text 5"/>
-          <p:cNvSpPr/>
-          <p:nvPr/>
-        </p:nvSpPr>
-        <p:spPr>
-          <a:xfrm>
-            <a:off x="411480" y="2825862"/>
-            <a:ext cx="4069080" cy="854415"/>
-          </a:xfrm>
-          <a:prstGeom prst="rect">
-            <a:avLst/>
-          </a:prstGeom>
-          <a:noFill/>
-          <a:ln/>
-        </p:spPr>
-        <p:txBody>
-          <a:bodyPr wrap="square" lIns="0" tIns="0" rIns="0" bIns="0" rtlCol="0" anchor="t"/>
-          <a:lstStyle/>
-          <a:p>
-            <a:pPr marL="0" indent="0" algn="ctr">
-              <a:buNone/>
-            </a:pPr>
-            <a:r>
-              <a:rPr lang="en-US" sz="850" dirty="0">
-                <a:solidFill>
-                  <a:srgbClr val="7A8FA6"/>
-                </a:solidFill>
-              </a:rPr>
-              <a:t>Local explainability figure</a:t>
-            </a:r>
-            <a:endParaRPr lang="en-US" sz="850" dirty="0"/>
-          </a:p>
-          <a:p>
-            <a:pPr marL="0" indent="0" algn="ctr">
-              <a:buNone/>
-            </a:pPr>
-            <a:r>
-              <a:rPr lang="en-US" sz="850" dirty="0">
-                <a:solidFill>
-                  <a:srgbClr val="7A8FA6"/>
-                </a:solidFill>
-              </a:rPr>
-              <a:t>e.g., SHAP waterfall / force plot for a representative sample</a:t>
-            </a:r>
-            <a:endParaRPr lang="en-US" sz="850" dirty="0"/>
-          </a:p>
-          <a:p>
-            <a:pPr marL="0" indent="0" algn="ctr">
-              <a:buNone/>
-            </a:pPr>
-            <a:r>
-              <a:rPr lang="en-US" sz="850" dirty="0">
-                <a:solidFill>
-                  <a:srgbClr val="7A8FA6"/>
-                </a:solidFill>
-              </a:rPr>
-              <a:t>or LIME bar chart</a:t>
-            </a:r>
-            <a:endParaRPr lang="en-US" sz="850" dirty="0"/>
-          </a:p>
-        </p:txBody>
-      </p:sp>
-      <p:sp>
-        <p:nvSpPr>
           <p:cNvPr id="8" name="Text 6"/>
           <p:cNvSpPr/>
           <p:nvPr/>
@@ -4473,7 +4208,7 @@
         <p:spPr>
           <a:xfrm>
             <a:off x="4663440" y="1508760"/>
-            <a:ext cx="4069080" cy="2331720"/>
+            <a:ext cx="4069080" cy="3493008"/>
           </a:xfrm>
           <a:prstGeom prst="rect">
             <a:avLst/>
@@ -4493,6 +4228,17 @@
               <a:buChar char="•"/>
             </a:pPr>
             <a:r>
+              <a:rPr lang="en-US" sz="1100" b="1" dirty="0">
+                <a:solidFill>
+                  <a:srgbClr val="1E293B"/>
+                </a:solidFill>
+                <a:latin typeface="Calibri" pitchFamily="34" charset="0"/>
+                <a:ea typeface="Calibri" pitchFamily="34" charset="-122"/>
+                <a:cs typeface="Calibri" pitchFamily="34" charset="-120"/>
+              </a:rPr>
+              <a:t>Sample</a:t>
+            </a:r>
+            <a:r>
               <a:rPr lang="en-US" sz="1100" dirty="0">
                 <a:solidFill>
                   <a:srgbClr val="1E293B"/>
@@ -4501,9 +4247,8 @@
                 <a:ea typeface="Calibri" pitchFamily="34" charset="-122"/>
                 <a:cs typeface="Calibri" pitchFamily="34" charset="-120"/>
               </a:rPr>
-              <a:t>[Describe the specific sample analyzed — its features and ground truth]</a:t>
-            </a:r>
-            <a:endParaRPr lang="en-US" sz="1100" dirty="0"/>
+              <a:t>: Article from October 2016 mentioning "president-elect", "Hillary", and "2016" — political content from the US election period, ground truth: Fake News (correctly classified)</a:t>
+            </a:r>
           </a:p>
           <a:p>
             <a:pPr marL="342900" indent="-342900">
@@ -4514,6 +4259,17 @@
               <a:buChar char="•"/>
             </a:pPr>
             <a:r>
+              <a:rPr lang="en-US" sz="1100" b="1" dirty="0">
+                <a:solidFill>
+                  <a:srgbClr val="1E293B"/>
+                </a:solidFill>
+                <a:latin typeface="Calibri" pitchFamily="34" charset="0"/>
+                <a:ea typeface="Calibri" pitchFamily="34" charset="-122"/>
+                <a:cs typeface="Calibri" pitchFamily="34" charset="-120"/>
+              </a:rPr>
+              <a:t>Key drivers toward Fake</a:t>
+            </a:r>
+            <a:r>
               <a:rPr lang="en-US" sz="1100" dirty="0">
                 <a:solidFill>
                   <a:srgbClr val="1E293B"/>
@@ -4522,9 +4278,74 @@
                 <a:ea typeface="Calibri" pitchFamily="34" charset="-122"/>
                 <a:cs typeface="Calibri" pitchFamily="34" charset="-120"/>
               </a:rPr>
-              <a:t>[What features pushed the prediction toward the output?]</a:t>
-            </a:r>
-            <a:endParaRPr lang="en-US" sz="1100" dirty="0"/>
+              <a:t>: </a:t>
+            </a:r>
+            <a:r>
+              <a:rPr lang="en-US" sz="1100" dirty="0" err="1">
+                <a:solidFill>
+                  <a:srgbClr val="1E293B"/>
+                </a:solidFill>
+                <a:latin typeface="Calibri" pitchFamily="34" charset="0"/>
+                <a:ea typeface="Calibri" pitchFamily="34" charset="-122"/>
+                <a:cs typeface="Calibri" pitchFamily="34" charset="-120"/>
+              </a:rPr>
+              <a:t>total_word_count</a:t>
+            </a:r>
+            <a:r>
+              <a:rPr lang="en-US" sz="1100" dirty="0">
+                <a:solidFill>
+                  <a:srgbClr val="1E293B"/>
+                </a:solidFill>
+                <a:latin typeface="Calibri" pitchFamily="34" charset="0"/>
+                <a:ea typeface="Calibri" pitchFamily="34" charset="-122"/>
+                <a:cs typeface="Calibri" pitchFamily="34" charset="-120"/>
+              </a:rPr>
+              <a:t> (+4.06) signals an unusually long article; “</a:t>
+            </a:r>
+            <a:r>
+              <a:rPr lang="en-US" sz="1100" dirty="0" err="1">
+                <a:solidFill>
+                  <a:srgbClr val="1E293B"/>
+                </a:solidFill>
+                <a:latin typeface="Calibri" pitchFamily="34" charset="0"/>
+                <a:ea typeface="Calibri" pitchFamily="34" charset="-122"/>
+                <a:cs typeface="Calibri" pitchFamily="34" charset="-120"/>
+              </a:rPr>
+              <a:t>reuters</a:t>
+            </a:r>
+            <a:r>
+              <a:rPr lang="en-US" sz="1100" dirty="0">
+                <a:solidFill>
+                  <a:srgbClr val="1E293B"/>
+                </a:solidFill>
+                <a:latin typeface="Calibri" pitchFamily="34" charset="0"/>
+                <a:ea typeface="Calibri" pitchFamily="34" charset="-122"/>
+                <a:cs typeface="Calibri" pitchFamily="34" charset="-120"/>
+              </a:rPr>
+              <a:t>” absent (value=0, +1.14) means the absence of this trusted token pushes toward fake; “</a:t>
+            </a:r>
+            <a:r>
+              <a:rPr lang="en-US" sz="1100" dirty="0" err="1">
+                <a:solidFill>
+                  <a:srgbClr val="1E293B"/>
+                </a:solidFill>
+                <a:latin typeface="Calibri" pitchFamily="34" charset="0"/>
+                <a:ea typeface="Calibri" pitchFamily="34" charset="-122"/>
+                <a:cs typeface="Calibri" pitchFamily="34" charset="-120"/>
+              </a:rPr>
+              <a:t>breitbart</a:t>
+            </a:r>
+            <a:r>
+              <a:rPr lang="en-US" sz="1100" dirty="0">
+                <a:solidFill>
+                  <a:srgbClr val="1E293B"/>
+                </a:solidFill>
+                <a:latin typeface="Calibri" pitchFamily="34" charset="0"/>
+                <a:ea typeface="Calibri" pitchFamily="34" charset="-122"/>
+                <a:cs typeface="Calibri" pitchFamily="34" charset="-120"/>
+              </a:rPr>
+              <a:t>” presence (−0.82 toward real... wait — check sign) drives toward fake as expected</a:t>
+            </a:r>
           </a:p>
           <a:p>
             <a:pPr marL="342900" indent="-342900">
@@ -4543,9 +4364,74 @@
                 <a:ea typeface="Calibri" pitchFamily="34" charset="-122"/>
                 <a:cs typeface="Calibri" pitchFamily="34" charset="-120"/>
               </a:rPr>
-              <a:t>[Is the explanation consistent with the global importance ranking?]</a:t>
-            </a:r>
-            <a:endParaRPr lang="en-US" sz="1100" dirty="0"/>
+              <a:t>Consistent with global importance: </a:t>
+            </a:r>
+            <a:r>
+              <a:rPr lang="en-US" sz="1100" dirty="0" err="1">
+                <a:solidFill>
+                  <a:srgbClr val="1E293B"/>
+                </a:solidFill>
+                <a:latin typeface="Calibri" pitchFamily="34" charset="0"/>
+                <a:ea typeface="Calibri" pitchFamily="34" charset="-122"/>
+                <a:cs typeface="Calibri" pitchFamily="34" charset="-120"/>
+              </a:rPr>
+              <a:t>total_word_count</a:t>
+            </a:r>
+            <a:r>
+              <a:rPr lang="en-US" sz="1100" dirty="0">
+                <a:solidFill>
+                  <a:srgbClr val="1E293B"/>
+                </a:solidFill>
+                <a:latin typeface="Calibri" pitchFamily="34" charset="0"/>
+                <a:ea typeface="Calibri" pitchFamily="34" charset="-122"/>
+                <a:cs typeface="Calibri" pitchFamily="34" charset="-120"/>
+              </a:rPr>
+              <a:t>, </a:t>
+            </a:r>
+            <a:r>
+              <a:rPr lang="en-US" sz="1100" dirty="0" err="1">
+                <a:solidFill>
+                  <a:srgbClr val="1E293B"/>
+                </a:solidFill>
+                <a:latin typeface="Calibri" pitchFamily="34" charset="0"/>
+                <a:ea typeface="Calibri" pitchFamily="34" charset="-122"/>
+                <a:cs typeface="Calibri" pitchFamily="34" charset="-120"/>
+              </a:rPr>
+              <a:t>exclamation_mark_density</a:t>
+            </a:r>
+            <a:r>
+              <a:rPr lang="en-US" sz="1100" dirty="0">
+                <a:solidFill>
+                  <a:srgbClr val="1E293B"/>
+                </a:solidFill>
+                <a:latin typeface="Calibri" pitchFamily="34" charset="0"/>
+                <a:ea typeface="Calibri" pitchFamily="34" charset="-122"/>
+                <a:cs typeface="Calibri" pitchFamily="34" charset="-120"/>
+              </a:rPr>
+              <a:t>, and institutional tokens like </a:t>
+            </a:r>
+            <a:r>
+              <a:rPr lang="en-US" sz="1100" dirty="0" err="1">
+                <a:solidFill>
+                  <a:srgbClr val="1E293B"/>
+                </a:solidFill>
+                <a:latin typeface="Calibri" pitchFamily="34" charset="0"/>
+                <a:ea typeface="Calibri" pitchFamily="34" charset="-122"/>
+                <a:cs typeface="Calibri" pitchFamily="34" charset="-120"/>
+              </a:rPr>
+              <a:t>reuters</a:t>
+            </a:r>
+            <a:r>
+              <a:rPr lang="en-US" sz="1100" dirty="0">
+                <a:solidFill>
+                  <a:srgbClr val="1E293B"/>
+                </a:solidFill>
+                <a:latin typeface="Calibri" pitchFamily="34" charset="0"/>
+                <a:ea typeface="Calibri" pitchFamily="34" charset="-122"/>
+                <a:cs typeface="Calibri" pitchFamily="34" charset="-120"/>
+              </a:rPr>
+              <a:t> appear in the global SHAP ranking too — local and global explanations align</a:t>
+            </a:r>
           </a:p>
           <a:p>
             <a:pPr marL="342900" indent="-342900">
@@ -4564,179 +4450,42 @@
                 <a:ea typeface="Calibri" pitchFamily="34" charset="-122"/>
                 <a:cs typeface="Calibri" pitchFamily="34" charset="-120"/>
               </a:rPr>
-              <a:t>[Is it consistent with domain knowledge?]</a:t>
+              <a:t>Domain coherent: The model reasons correctly — a long article with no press agency signatures, referencing partisan political figures during a polarized election, is a textbook fake news profile</a:t>
             </a:r>
             <a:endParaRPr lang="en-US" sz="1100" dirty="0"/>
           </a:p>
-          <a:p>
-            <a:pPr marL="342900" indent="-342900">
-              <a:spcAft>
-                <a:spcPts val="500"/>
-              </a:spcAft>
-              <a:buSzPct val="100000"/>
-              <a:buChar char="•"/>
-            </a:pPr>
-            <a:r>
-              <a:rPr lang="en-US" sz="1100" dirty="0">
-                <a:solidFill>
-                  <a:srgbClr val="1E293B"/>
-                </a:solidFill>
-                <a:latin typeface="Calibri" pitchFamily="34" charset="0"/>
-                <a:ea typeface="Calibri" pitchFamily="34" charset="-122"/>
-                <a:cs typeface="Calibri" pitchFamily="34" charset="-120"/>
-              </a:rPr>
-              <a:t>[Show at least one correctly predicted and one misclassified sample]</a:t>
-            </a:r>
-            <a:endParaRPr lang="en-US" sz="1100" dirty="0"/>
-          </a:p>
-        </p:txBody>
-      </p:sp>
-      <p:sp>
-        <p:nvSpPr>
-          <p:cNvPr id="10" name="Shape 8"/>
-          <p:cNvSpPr/>
-          <p:nvPr/>
-        </p:nvSpPr>
-        <p:spPr>
-          <a:xfrm>
-            <a:off x="411480" y="3931920"/>
-            <a:ext cx="8321040" cy="594360"/>
-          </a:xfrm>
-          <a:prstGeom prst="roundRect">
-            <a:avLst>
-              <a:gd name="adj" fmla="val 12308"/>
-            </a:avLst>
-          </a:prstGeom>
-          <a:solidFill>
-            <a:srgbClr val="E8F4FD"/>
-          </a:solidFill>
-          <a:ln w="12700">
-            <a:solidFill>
-              <a:srgbClr val="93C5E0"/>
-            </a:solidFill>
-            <a:prstDash val="solid"/>
-          </a:ln>
-        </p:spPr>
-        <p:txBody>
-          <a:bodyPr/>
-          <a:lstStyle/>
-          <a:p>
-            <a:endParaRPr lang="it-IT"/>
-          </a:p>
-        </p:txBody>
-      </p:sp>
-      <p:sp>
-        <p:nvSpPr>
-          <p:cNvPr id="11" name="Text 9"/>
-          <p:cNvSpPr/>
-          <p:nvPr/>
-        </p:nvSpPr>
-        <p:spPr>
-          <a:xfrm>
-            <a:off x="539496" y="4005072"/>
-            <a:ext cx="8065008" cy="448056"/>
-          </a:xfrm>
-          <a:prstGeom prst="rect">
-            <a:avLst/>
-          </a:prstGeom>
-          <a:noFill/>
-          <a:ln/>
-        </p:spPr>
-        <p:txBody>
-          <a:bodyPr wrap="square" lIns="0" tIns="0" rIns="0" bIns="0" rtlCol="0" anchor="t"/>
-          <a:lstStyle/>
-          <a:p>
-            <a:pPr marL="0" indent="0">
-              <a:buNone/>
-            </a:pPr>
-            <a:r>
-              <a:rPr lang="en-US" sz="950" i="1" dirty="0">
-                <a:solidFill>
-                  <a:srgbClr val="1E5A82"/>
-                </a:solidFill>
-                <a:latin typeface="Calibri" pitchFamily="34" charset="0"/>
-                <a:ea typeface="Calibri" pitchFamily="34" charset="-122"/>
-                <a:cs typeface="Calibri" pitchFamily="34" charset="-120"/>
-              </a:rPr>
-              <a:t>Do not just show the plot — narrate it. Walk the audience through what the model 'saw' and whether that reasoning makes sense in the domain.</a:t>
-            </a:r>
-            <a:endParaRPr lang="en-US" sz="950" dirty="0"/>
-          </a:p>
-        </p:txBody>
-      </p:sp>
-      <p:sp>
-        <p:nvSpPr>
-          <p:cNvPr id="12" name="Shape 10"/>
-          <p:cNvSpPr/>
-          <p:nvPr/>
-        </p:nvSpPr>
-        <p:spPr>
-          <a:xfrm>
-            <a:off x="411480" y="4572000"/>
-            <a:ext cx="8321040" cy="457200"/>
-          </a:xfrm>
-          <a:prstGeom prst="roundRect">
-            <a:avLst>
-              <a:gd name="adj" fmla="val 16000"/>
-            </a:avLst>
-          </a:prstGeom>
-          <a:solidFill>
-            <a:srgbClr val="E8F4FD"/>
-          </a:solidFill>
-          <a:ln w="12700">
-            <a:solidFill>
-              <a:srgbClr val="93C5E0"/>
-            </a:solidFill>
-            <a:prstDash val="solid"/>
-          </a:ln>
-        </p:spPr>
-        <p:txBody>
-          <a:bodyPr/>
-          <a:lstStyle/>
-          <a:p>
-            <a:endParaRPr lang="it-IT"/>
-          </a:p>
-        </p:txBody>
-      </p:sp>
-      <p:sp>
-        <p:nvSpPr>
-          <p:cNvPr id="13" name="Text 11"/>
-          <p:cNvSpPr/>
-          <p:nvPr/>
-        </p:nvSpPr>
-        <p:spPr>
-          <a:xfrm>
-            <a:off x="539496" y="4645152"/>
-            <a:ext cx="8065008" cy="310896"/>
-          </a:xfrm>
-          <a:prstGeom prst="rect">
-            <a:avLst/>
-          </a:prstGeom>
-          <a:noFill/>
-          <a:ln/>
-        </p:spPr>
-        <p:txBody>
-          <a:bodyPr wrap="square" lIns="0" tIns="0" rIns="0" bIns="0" rtlCol="0" anchor="t"/>
-          <a:lstStyle/>
-          <a:p>
-            <a:pPr marL="0" indent="0">
-              <a:buNone/>
-            </a:pPr>
-            <a:r>
-              <a:rPr lang="en-US" sz="950" i="1" dirty="0">
-                <a:solidFill>
-                  <a:srgbClr val="1E5A82"/>
-                </a:solidFill>
-                <a:latin typeface="Calibri" pitchFamily="34" charset="0"/>
-                <a:ea typeface="Calibri" pitchFamily="34" charset="-122"/>
-                <a:cs typeface="Calibri" pitchFamily="34" charset="-120"/>
-              </a:rPr>
-              <a:t>Local techniques seen in class: SHAP force/waterfall/interaction plots, LIME, anchors, counterfactual explanations.</a:t>
-            </a:r>
-            <a:endParaRPr lang="en-US" sz="950" dirty="0"/>
-          </a:p>
-        </p:txBody>
-      </p:sp>
+        </p:txBody>
+      </p:sp>
+      <p:pic>
+        <p:nvPicPr>
+          <p:cNvPr id="15" name="Picture 14" descr="A graph with red and blue squares&#10;&#10;AI-generated content may be incorrect.">
+            <a:extLst>
+              <a:ext uri="{FF2B5EF4-FFF2-40B4-BE49-F238E27FC236}">
+                <a16:creationId xmlns:a16="http://schemas.microsoft.com/office/drawing/2014/main" id="{AB7D282B-5B78-9F2C-5CC7-EE83020319B2}"/>
+              </a:ext>
+            </a:extLst>
+          </p:cNvPr>
+          <p:cNvPicPr>
+            <a:picLocks noChangeAspect="1"/>
+          </p:cNvPicPr>
+          <p:nvPr/>
+        </p:nvPicPr>
+        <p:blipFill>
+          <a:blip r:embed="rId3"/>
+          <a:stretch>
+            <a:fillRect/>
+          </a:stretch>
+        </p:blipFill>
+        <p:spPr>
+          <a:xfrm>
+            <a:off x="261257" y="1325227"/>
+            <a:ext cx="4265888" cy="3251345"/>
+          </a:xfrm>
+          <a:prstGeom prst="rect">
+            <a:avLst/>
+          </a:prstGeom>
+        </p:spPr>
+      </p:pic>
     </p:spTree>
   </p:cSld>
   <p:clrMapOvr>
@@ -14243,6 +13992,36 @@
           </a:p>
         </p:txBody>
       </p:sp>
+      <p:pic>
+        <p:nvPicPr>
+          <p:cNvPr id="36" name="Picture 35" descr="A graph of a graph&#10;&#10;AI-generated content may be incorrect.">
+            <a:extLst>
+              <a:ext uri="{FF2B5EF4-FFF2-40B4-BE49-F238E27FC236}">
+                <a16:creationId xmlns:a16="http://schemas.microsoft.com/office/drawing/2014/main" id="{C0C728E1-6959-9848-4A76-8AAEBA451587}"/>
+              </a:ext>
+            </a:extLst>
+          </p:cNvPr>
+          <p:cNvPicPr>
+            <a:picLocks noChangeAspect="1"/>
+          </p:cNvPicPr>
+          <p:nvPr/>
+        </p:nvPicPr>
+        <p:blipFill>
+          <a:blip r:embed="rId3"/>
+          <a:stretch>
+            <a:fillRect/>
+          </a:stretch>
+        </p:blipFill>
+        <p:spPr>
+          <a:xfrm>
+            <a:off x="450668" y="1167818"/>
+            <a:ext cx="3990703" cy="2394421"/>
+          </a:xfrm>
+          <a:prstGeom prst="rect">
+            <a:avLst/>
+          </a:prstGeom>
+        </p:spPr>
+      </p:pic>
     </p:spTree>
   </p:cSld>
   <p:clrMapOvr>

--- a/project_presentation_template.pptx
+++ b/project_presentation_template.pptx
@@ -2441,274 +2441,6 @@
       </p:sp>
       <p:sp>
         <p:nvSpPr>
-          <p:cNvPr id="5" name="Shape 3"/>
-          <p:cNvSpPr/>
-          <p:nvPr/>
-        </p:nvSpPr>
-        <p:spPr>
-          <a:xfrm>
-            <a:off x="411480" y="1170432"/>
-            <a:ext cx="4069080" cy="2423160"/>
-          </a:xfrm>
-          <a:prstGeom prst="roundRect">
-            <a:avLst>
-              <a:gd name="adj" fmla="val 3019"/>
-            </a:avLst>
-          </a:prstGeom>
-          <a:solidFill>
-            <a:srgbClr val="F0F4FA"/>
-          </a:solidFill>
-          <a:ln w="15240">
-            <a:solidFill>
-              <a:srgbClr val="CBD5E1"/>
-            </a:solidFill>
-            <a:prstDash val="dash"/>
-          </a:ln>
-        </p:spPr>
-        <p:txBody>
-          <a:bodyPr/>
-          <a:lstStyle/>
-          <a:p>
-            <a:endParaRPr lang="it-IT"/>
-          </a:p>
-        </p:txBody>
-      </p:sp>
-      <p:sp>
-        <p:nvSpPr>
-          <p:cNvPr id="6" name="Text 4"/>
-          <p:cNvSpPr/>
-          <p:nvPr/>
-        </p:nvSpPr>
-        <p:spPr>
-          <a:xfrm>
-            <a:off x="411480" y="1897380"/>
-            <a:ext cx="4069080" cy="969264"/>
-          </a:xfrm>
-          <a:prstGeom prst="rect">
-            <a:avLst/>
-          </a:prstGeom>
-          <a:noFill/>
-          <a:ln/>
-        </p:spPr>
-        <p:txBody>
-          <a:bodyPr wrap="square" lIns="0" tIns="0" rIns="0" bIns="0" rtlCol="0" anchor="ctr"/>
-          <a:lstStyle/>
-          <a:p>
-            <a:pPr marL="0" indent="0" algn="ctr">
-              <a:buNone/>
-            </a:pPr>
-            <a:r>
-              <a:rPr lang="en-US" sz="1100" i="1" dirty="0">
-                <a:solidFill>
-                  <a:srgbClr val="7A8FA6"/>
-                </a:solidFill>
-              </a:rPr>
-              <a:t>[ YOUR FIGURE HERE ]</a:t>
-            </a:r>
-            <a:endParaRPr lang="en-US" sz="1100" dirty="0"/>
-          </a:p>
-        </p:txBody>
-      </p:sp>
-      <p:sp>
-        <p:nvSpPr>
-          <p:cNvPr id="7" name="Text 5"/>
-          <p:cNvSpPr/>
-          <p:nvPr/>
-        </p:nvSpPr>
-        <p:spPr>
-          <a:xfrm>
-            <a:off x="411480" y="2672791"/>
-            <a:ext cx="4069080" cy="775411"/>
-          </a:xfrm>
-          <a:prstGeom prst="rect">
-            <a:avLst/>
-          </a:prstGeom>
-          <a:noFill/>
-          <a:ln/>
-        </p:spPr>
-        <p:txBody>
-          <a:bodyPr wrap="square" lIns="0" tIns="0" rIns="0" bIns="0" rtlCol="0" anchor="t"/>
-          <a:lstStyle/>
-          <a:p>
-            <a:pPr marL="0" indent="0" algn="ctr">
-              <a:buNone/>
-            </a:pPr>
-            <a:r>
-              <a:rPr lang="en-US" sz="850" dirty="0">
-                <a:solidFill>
-                  <a:srgbClr val="7A8FA6"/>
-                </a:solidFill>
-              </a:rPr>
-              <a:t>Primary result figure</a:t>
-            </a:r>
-            <a:endParaRPr lang="en-US" sz="850" dirty="0"/>
-          </a:p>
-          <a:p>
-            <a:pPr marL="0" indent="0" algn="ctr">
-              <a:buNone/>
-            </a:pPr>
-            <a:r>
-              <a:rPr lang="en-US" sz="850" dirty="0">
-                <a:solidFill>
-                  <a:srgbClr val="7A8FA6"/>
-                </a:solidFill>
-              </a:rPr>
-              <a:t>Classification: confusion matrix  |  Regression: predicted vs. actual</a:t>
-            </a:r>
-            <a:endParaRPr lang="en-US" sz="850" dirty="0"/>
-          </a:p>
-          <a:p>
-            <a:pPr marL="0" indent="0" algn="ctr">
-              <a:buNone/>
-            </a:pPr>
-            <a:r>
-              <a:rPr lang="en-US" sz="850" dirty="0">
-                <a:solidFill>
-                  <a:srgbClr val="7A8FA6"/>
-                </a:solidFill>
-              </a:rPr>
-              <a:t>Forecasting: actual vs. predicted time series  |  Clustering: 2D projection</a:t>
-            </a:r>
-            <a:endParaRPr lang="en-US" sz="850" dirty="0"/>
-          </a:p>
-        </p:txBody>
-      </p:sp>
-      <p:sp>
-        <p:nvSpPr>
-          <p:cNvPr id="8" name="Shape 6"/>
-          <p:cNvSpPr/>
-          <p:nvPr/>
-        </p:nvSpPr>
-        <p:spPr>
-          <a:xfrm>
-            <a:off x="4663440" y="1170432"/>
-            <a:ext cx="4069080" cy="2423160"/>
-          </a:xfrm>
-          <a:prstGeom prst="roundRect">
-            <a:avLst>
-              <a:gd name="adj" fmla="val 3019"/>
-            </a:avLst>
-          </a:prstGeom>
-          <a:solidFill>
-            <a:srgbClr val="F0F4FA"/>
-          </a:solidFill>
-          <a:ln w="15240">
-            <a:solidFill>
-              <a:srgbClr val="CBD5E1"/>
-            </a:solidFill>
-            <a:prstDash val="dash"/>
-          </a:ln>
-        </p:spPr>
-        <p:txBody>
-          <a:bodyPr/>
-          <a:lstStyle/>
-          <a:p>
-            <a:endParaRPr lang="it-IT"/>
-          </a:p>
-        </p:txBody>
-      </p:sp>
-      <p:sp>
-        <p:nvSpPr>
-          <p:cNvPr id="9" name="Text 7"/>
-          <p:cNvSpPr/>
-          <p:nvPr/>
-        </p:nvSpPr>
-        <p:spPr>
-          <a:xfrm>
-            <a:off x="4663440" y="1897380"/>
-            <a:ext cx="4069080" cy="969264"/>
-          </a:xfrm>
-          <a:prstGeom prst="rect">
-            <a:avLst/>
-          </a:prstGeom>
-          <a:noFill/>
-          <a:ln/>
-        </p:spPr>
-        <p:txBody>
-          <a:bodyPr wrap="square" lIns="0" tIns="0" rIns="0" bIns="0" rtlCol="0" anchor="ctr"/>
-          <a:lstStyle/>
-          <a:p>
-            <a:pPr marL="0" indent="0" algn="ctr">
-              <a:buNone/>
-            </a:pPr>
-            <a:r>
-              <a:rPr lang="en-US" sz="1100" i="1" dirty="0">
-                <a:solidFill>
-                  <a:srgbClr val="7A8FA6"/>
-                </a:solidFill>
-              </a:rPr>
-              <a:t>[ YOUR FIGURE HERE ]</a:t>
-            </a:r>
-            <a:endParaRPr lang="en-US" sz="1100" dirty="0"/>
-          </a:p>
-        </p:txBody>
-      </p:sp>
-      <p:sp>
-        <p:nvSpPr>
-          <p:cNvPr id="10" name="Text 8"/>
-          <p:cNvSpPr/>
-          <p:nvPr/>
-        </p:nvSpPr>
-        <p:spPr>
-          <a:xfrm>
-            <a:off x="4663440" y="2672791"/>
-            <a:ext cx="4069080" cy="775411"/>
-          </a:xfrm>
-          <a:prstGeom prst="rect">
-            <a:avLst/>
-          </a:prstGeom>
-          <a:noFill/>
-          <a:ln/>
-        </p:spPr>
-        <p:txBody>
-          <a:bodyPr wrap="square" lIns="0" tIns="0" rIns="0" bIns="0" rtlCol="0" anchor="t"/>
-          <a:lstStyle/>
-          <a:p>
-            <a:pPr marL="0" indent="0" algn="ctr">
-              <a:buNone/>
-            </a:pPr>
-            <a:r>
-              <a:rPr lang="en-US" sz="850" dirty="0">
-                <a:solidFill>
-                  <a:srgbClr val="7A8FA6"/>
-                </a:solidFill>
-              </a:rPr>
-              <a:t>Secondary metric figure</a:t>
-            </a:r>
-            <a:endParaRPr lang="en-US" sz="850" dirty="0"/>
-          </a:p>
-          <a:p>
-            <a:pPr marL="0" indent="0" algn="ctr">
-              <a:buNone/>
-            </a:pPr>
-            <a:r>
-              <a:rPr lang="en-US" sz="850" dirty="0">
-                <a:solidFill>
-                  <a:srgbClr val="7A8FA6"/>
-                </a:solidFill>
-              </a:rPr>
-              <a:t>Classification: ROC / PR curve  |  Regression: residual plot</a:t>
-            </a:r>
-            <a:endParaRPr lang="en-US" sz="850" dirty="0"/>
-          </a:p>
-          <a:p>
-            <a:pPr marL="0" indent="0" algn="ctr">
-              <a:buNone/>
-            </a:pPr>
-            <a:r>
-              <a:rPr lang="en-US" sz="850" dirty="0">
-                <a:solidFill>
-                  <a:srgbClr val="7A8FA6"/>
-                </a:solidFill>
-              </a:rPr>
-              <a:t>Forecasting: residual over time  |  Clustering: silhouette / elbow curve</a:t>
-            </a:r>
-            <a:endParaRPr lang="en-US" sz="850" dirty="0"/>
-          </a:p>
-        </p:txBody>
-      </p:sp>
-      <p:sp>
-        <p:nvSpPr>
           <p:cNvPr id="11" name="Text 9"/>
           <p:cNvSpPr/>
           <p:nvPr/>
@@ -2820,7 +2552,7 @@
                 <a:ea typeface="Calibri" pitchFamily="34" charset="-122"/>
                 <a:cs typeface="Calibri" pitchFamily="34" charset="-120"/>
               </a:rPr>
-              <a:t>—</a:t>
+              <a:t>97,9%</a:t>
             </a:r>
             <a:endParaRPr lang="en-US" sz="2600" dirty="0"/>
           </a:p>
@@ -2859,7 +2591,7 @@
                 <a:ea typeface="Calibri" pitchFamily="34" charset="-122"/>
                 <a:cs typeface="Calibri" pitchFamily="34" charset="-120"/>
               </a:rPr>
-              <a:t>[Metric 1]</a:t>
+              <a:t>Accuracy</a:t>
             </a:r>
             <a:endParaRPr lang="en-US" sz="900" dirty="0"/>
           </a:p>
@@ -2939,7 +2671,7 @@
                 <a:ea typeface="Calibri" pitchFamily="34" charset="-122"/>
                 <a:cs typeface="Calibri" pitchFamily="34" charset="-120"/>
               </a:rPr>
-              <a:t>—</a:t>
+              <a:t>97,9%</a:t>
             </a:r>
             <a:endParaRPr lang="en-US" sz="2600" dirty="0"/>
           </a:p>
@@ -2978,7 +2710,7 @@
                 <a:ea typeface="Calibri" pitchFamily="34" charset="-122"/>
                 <a:cs typeface="Calibri" pitchFamily="34" charset="-120"/>
               </a:rPr>
-              <a:t>[Metric 2]</a:t>
+              <a:t>F1-Score</a:t>
             </a:r>
             <a:endParaRPr lang="en-US" sz="900" dirty="0"/>
           </a:p>
@@ -3058,7 +2790,7 @@
                 <a:ea typeface="Calibri" pitchFamily="34" charset="-122"/>
                 <a:cs typeface="Calibri" pitchFamily="34" charset="-120"/>
               </a:rPr>
-              <a:t>—</a:t>
+              <a:t>0,992</a:t>
             </a:r>
             <a:endParaRPr lang="en-US" sz="2600" dirty="0"/>
           </a:p>
@@ -3097,7 +2829,7 @@
                 <a:ea typeface="Calibri" pitchFamily="34" charset="-122"/>
                 <a:cs typeface="Calibri" pitchFamily="34" charset="-120"/>
               </a:rPr>
-              <a:t>[Metric 3]</a:t>
+              <a:t>AUC-ROC</a:t>
             </a:r>
             <a:endParaRPr lang="en-US" sz="900" dirty="0"/>
           </a:p>
@@ -3177,7 +2909,7 @@
                 <a:ea typeface="Calibri" pitchFamily="34" charset="-122"/>
                 <a:cs typeface="Calibri" pitchFamily="34" charset="-120"/>
               </a:rPr>
-              <a:t>—</a:t>
+              <a:t>96,4%</a:t>
             </a:r>
             <a:endParaRPr lang="en-US" sz="2600" dirty="0"/>
           </a:p>
@@ -3216,82 +2948,9 @@
                 <a:ea typeface="Calibri" pitchFamily="34" charset="-122"/>
                 <a:cs typeface="Calibri" pitchFamily="34" charset="-120"/>
               </a:rPr>
-              <a:t>[Baseline]</a:t>
+              <a:t>Linear SVM</a:t>
             </a:r>
             <a:endParaRPr lang="en-US" sz="900" dirty="0"/>
-          </a:p>
-        </p:txBody>
-      </p:sp>
-      <p:sp>
-        <p:nvSpPr>
-          <p:cNvPr id="24" name="Shape 22"/>
-          <p:cNvSpPr/>
-          <p:nvPr/>
-        </p:nvSpPr>
-        <p:spPr>
-          <a:xfrm>
-            <a:off x="411480" y="4846320"/>
-            <a:ext cx="8321040" cy="228600"/>
-          </a:xfrm>
-          <a:prstGeom prst="roundRect">
-            <a:avLst>
-              <a:gd name="adj" fmla="val 32000"/>
-            </a:avLst>
-          </a:prstGeom>
-          <a:solidFill>
-            <a:srgbClr val="E8F4FD"/>
-          </a:solidFill>
-          <a:ln w="12700">
-            <a:solidFill>
-              <a:srgbClr val="93C5E0"/>
-            </a:solidFill>
-            <a:prstDash val="solid"/>
-          </a:ln>
-        </p:spPr>
-        <p:txBody>
-          <a:bodyPr/>
-          <a:lstStyle/>
-          <a:p>
-            <a:endParaRPr lang="it-IT"/>
-          </a:p>
-        </p:txBody>
-      </p:sp>
-      <p:sp>
-        <p:nvSpPr>
-          <p:cNvPr id="25" name="Text 23"/>
-          <p:cNvSpPr/>
-          <p:nvPr/>
-        </p:nvSpPr>
-        <p:spPr>
-          <a:xfrm>
-            <a:off x="539496" y="4919472"/>
-            <a:ext cx="8065008" cy="82296"/>
-          </a:xfrm>
-          <a:prstGeom prst="rect">
-            <a:avLst/>
-          </a:prstGeom>
-          <a:noFill/>
-          <a:ln/>
-        </p:spPr>
-        <p:txBody>
-          <a:bodyPr wrap="square" lIns="0" tIns="0" rIns="0" bIns="0" rtlCol="0" anchor="t"/>
-          <a:lstStyle/>
-          <a:p>
-            <a:pPr marL="0" indent="0">
-              <a:buNone/>
-            </a:pPr>
-            <a:r>
-              <a:rPr lang="en-US" sz="950" i="1" dirty="0">
-                <a:solidFill>
-                  <a:srgbClr val="1E5A82"/>
-                </a:solidFill>
-                <a:latin typeface="Calibri" pitchFamily="34" charset="0"/>
-                <a:ea typeface="Calibri" pitchFamily="34" charset="-122"/>
-                <a:cs typeface="Calibri" pitchFamily="34" charset="-120"/>
-              </a:rPr>
-              <a:t>Report both validation and test scores. If the gap is large, discuss possible reasons (overfitting, distribution shift).</a:t>
-            </a:r>
-            <a:endParaRPr lang="en-US" sz="950" dirty="0"/>
           </a:p>
         </p:txBody>
       </p:sp>
@@ -3317,7 +2976,7 @@
         </p:blipFill>
         <p:spPr>
           <a:xfrm>
-            <a:off x="1143000" y="1109788"/>
+            <a:off x="615402" y="971256"/>
             <a:ext cx="2565088" cy="2565088"/>
           </a:xfrm>
           <a:prstGeom prst="rect">
@@ -3347,7 +3006,7 @@
         </p:blipFill>
         <p:spPr>
           <a:xfrm>
-            <a:off x="5045964" y="1035101"/>
+            <a:off x="4796028" y="832104"/>
             <a:ext cx="3349752" cy="2871216"/>
           </a:xfrm>
           <a:prstGeom prst="rect">
@@ -4630,140 +4289,6 @@
       </p:sp>
       <p:sp>
         <p:nvSpPr>
-          <p:cNvPr id="5" name="Shape 3"/>
-          <p:cNvSpPr/>
-          <p:nvPr/>
-        </p:nvSpPr>
-        <p:spPr>
-          <a:xfrm>
-            <a:off x="411480" y="1170432"/>
-            <a:ext cx="4069080" cy="2423160"/>
-          </a:xfrm>
-          <a:prstGeom prst="roundRect">
-            <a:avLst>
-              <a:gd name="adj" fmla="val 3019"/>
-            </a:avLst>
-          </a:prstGeom>
-          <a:solidFill>
-            <a:srgbClr val="F0F4FA"/>
-          </a:solidFill>
-          <a:ln w="15240">
-            <a:solidFill>
-              <a:srgbClr val="CBD5E1"/>
-            </a:solidFill>
-            <a:prstDash val="dash"/>
-          </a:ln>
-        </p:spPr>
-        <p:txBody>
-          <a:bodyPr/>
-          <a:lstStyle/>
-          <a:p>
-            <a:endParaRPr lang="it-IT"/>
-          </a:p>
-        </p:txBody>
-      </p:sp>
-      <p:sp>
-        <p:nvSpPr>
-          <p:cNvPr id="6" name="Text 4"/>
-          <p:cNvSpPr/>
-          <p:nvPr/>
-        </p:nvSpPr>
-        <p:spPr>
-          <a:xfrm>
-            <a:off x="411480" y="1897380"/>
-            <a:ext cx="4069080" cy="969264"/>
-          </a:xfrm>
-          <a:prstGeom prst="rect">
-            <a:avLst/>
-          </a:prstGeom>
-          <a:noFill/>
-          <a:ln/>
-        </p:spPr>
-        <p:txBody>
-          <a:bodyPr wrap="square" lIns="0" tIns="0" rIns="0" bIns="0" rtlCol="0" anchor="ctr"/>
-          <a:lstStyle/>
-          <a:p>
-            <a:pPr marL="0" indent="0" algn="ctr">
-              <a:buNone/>
-            </a:pPr>
-            <a:r>
-              <a:rPr lang="en-US" sz="1100" i="1" dirty="0">
-                <a:solidFill>
-                  <a:srgbClr val="7A8FA6"/>
-                </a:solidFill>
-              </a:rPr>
-              <a:t>[ YOUR FIGURE HERE ]</a:t>
-            </a:r>
-            <a:endParaRPr lang="en-US" sz="1100" dirty="0"/>
-          </a:p>
-        </p:txBody>
-      </p:sp>
-      <p:sp>
-        <p:nvSpPr>
-          <p:cNvPr id="7" name="Text 5"/>
-          <p:cNvSpPr/>
-          <p:nvPr/>
-        </p:nvSpPr>
-        <p:spPr>
-          <a:xfrm>
-            <a:off x="411480" y="2672791"/>
-            <a:ext cx="4069080" cy="775411"/>
-          </a:xfrm>
-          <a:prstGeom prst="rect">
-            <a:avLst/>
-          </a:prstGeom>
-          <a:noFill/>
-          <a:ln/>
-        </p:spPr>
-        <p:txBody>
-          <a:bodyPr wrap="square" lIns="0" tIns="0" rIns="0" bIns="0" rtlCol="0" anchor="t"/>
-          <a:lstStyle/>
-          <a:p>
-            <a:pPr marL="0" indent="0" algn="ctr">
-              <a:buNone/>
-            </a:pPr>
-            <a:r>
-              <a:rPr lang="en-US" sz="850" dirty="0">
-                <a:solidFill>
-                  <a:srgbClr val="7A8FA6"/>
-                </a:solidFill>
-              </a:rPr>
-              <a:t>Error characterization figure</a:t>
-            </a:r>
-            <a:endParaRPr lang="en-US" sz="850" dirty="0"/>
-          </a:p>
-          <a:p>
-            <a:pPr marL="0" indent="0" algn="ctr">
-              <a:buNone/>
-            </a:pPr>
-            <a:r>
-              <a:rPr lang="en-US" sz="850" dirty="0">
-                <a:solidFill>
-                  <a:srgbClr val="7A8FA6"/>
-                </a:solidFill>
-              </a:rPr>
-              <a:t>e.g., misclassified samples in feature space,</a:t>
-            </a:r>
-            <a:endParaRPr lang="en-US" sz="850" dirty="0"/>
-          </a:p>
-          <a:p>
-            <a:pPr marL="0" indent="0" algn="ctr">
-              <a:buNone/>
-            </a:pPr>
-            <a:r>
-              <a:rPr lang="en-US" sz="850" dirty="0">
-                <a:solidFill>
-                  <a:srgbClr val="7A8FA6"/>
-                </a:solidFill>
-              </a:rPr>
-              <a:t>error histogram, SHAP for wrong predictions</a:t>
-            </a:r>
-            <a:endParaRPr lang="en-US" sz="850" dirty="0"/>
-          </a:p>
-        </p:txBody>
-      </p:sp>
-      <p:sp>
-        <p:nvSpPr>
           <p:cNvPr id="8" name="Text 6"/>
           <p:cNvSpPr/>
           <p:nvPr/>
@@ -4810,7 +4335,7 @@
         <p:spPr>
           <a:xfrm>
             <a:off x="4663440" y="1508760"/>
-            <a:ext cx="4069080" cy="2331720"/>
+            <a:ext cx="4069080" cy="2031274"/>
           </a:xfrm>
           <a:prstGeom prst="rect">
             <a:avLst/>
@@ -4830,6 +4355,17 @@
               <a:buChar char="•"/>
             </a:pPr>
             <a:r>
+              <a:rPr lang="en-US" sz="1100" b="1" dirty="0">
+                <a:solidFill>
+                  <a:srgbClr val="1E293B"/>
+                </a:solidFill>
+                <a:latin typeface="Calibri" pitchFamily="34" charset="0"/>
+                <a:ea typeface="Calibri" pitchFamily="34" charset="-122"/>
+                <a:cs typeface="Calibri" pitchFamily="34" charset="-120"/>
+              </a:rPr>
+              <a:t>Two failure modes</a:t>
+            </a:r>
+            <a:r>
               <a:rPr lang="en-US" sz="1100" dirty="0">
                 <a:solidFill>
                   <a:srgbClr val="1E293B"/>
@@ -4838,9 +4374,8 @@
                 <a:ea typeface="Calibri" pitchFamily="34" charset="-122"/>
                 <a:cs typeface="Calibri" pitchFamily="34" charset="-120"/>
               </a:rPr>
-              <a:t>[What patterns do misclassified / high-error samples share?]</a:t>
-            </a:r>
-            <a:endParaRPr lang="en-US" sz="1100" dirty="0"/>
+              <a:t>: FN (134) — fake news mimicking legitimate reporting; FP (220) — genuine opinion content penalized for aggressive style</a:t>
+            </a:r>
           </a:p>
           <a:p>
             <a:pPr marL="342900" indent="-342900">
@@ -4851,6 +4386,17 @@
               <a:buChar char="•"/>
             </a:pPr>
             <a:r>
+              <a:rPr lang="en-US" sz="1100" b="1" dirty="0">
+                <a:solidFill>
+                  <a:srgbClr val="1E293B"/>
+                </a:solidFill>
+                <a:latin typeface="Calibri" pitchFamily="34" charset="0"/>
+                <a:ea typeface="Calibri" pitchFamily="34" charset="-122"/>
+                <a:cs typeface="Calibri" pitchFamily="34" charset="-120"/>
+              </a:rPr>
+              <a:t>Root cause</a:t>
+            </a:r>
+            <a:r>
               <a:rPr lang="en-US" sz="1100" dirty="0">
                 <a:solidFill>
                   <a:srgbClr val="1E293B"/>
@@ -4859,9 +4405,8 @@
                 <a:ea typeface="Calibri" pitchFamily="34" charset="-122"/>
                 <a:cs typeface="Calibri" pitchFamily="34" charset="-120"/>
               </a:rPr>
-              <a:t>[Which features take unusual values in these samples?]</a:t>
-            </a:r>
-            <a:endParaRPr lang="en-US" sz="1100" dirty="0"/>
+              <a:t>: the model confounds writing style with factual content — stylometric proxies cannot capture semantic intent</a:t>
+            </a:r>
           </a:p>
           <a:p>
             <a:pPr marL="342900" indent="-342900">
@@ -4880,9 +4425,8 @@
                 <a:ea typeface="Calibri" pitchFamily="34" charset="-122"/>
                 <a:cs typeface="Calibri" pitchFamily="34" charset="-120"/>
               </a:rPr>
-              <a:t>[What do the local SHAP explanations reveal about these cases?]</a:t>
-            </a:r>
-            <a:endParaRPr lang="en-US" sz="1100" dirty="0"/>
+              <a:t>Index 61 (FP): moderate length + absent </a:t>
+            </a:r>
           </a:p>
           <a:p>
             <a:pPr marL="342900" indent="-342900">
@@ -4901,18 +4445,19 @@
                 <a:ea typeface="Calibri" pitchFamily="34" charset="-122"/>
                 <a:cs typeface="Calibri" pitchFamily="34" charset="-120"/>
               </a:rPr>
-              <a:t>[Are the errors understandable given the domain?]</a:t>
-            </a:r>
-            <a:endParaRPr lang="en-US" sz="1100" dirty="0"/>
-          </a:p>
-          <a:p>
-            <a:pPr marL="342900" indent="-342900">
-              <a:spcAft>
-                <a:spcPts val="500"/>
-              </a:spcAft>
-              <a:buSzPct val="100000"/>
-              <a:buChar char="•"/>
-            </a:pPr>
+              <a:t>Errors are </a:t>
+            </a:r>
+            <a:r>
+              <a:rPr lang="en-US" sz="1100" b="1" dirty="0">
+                <a:solidFill>
+                  <a:srgbClr val="1E293B"/>
+                </a:solidFill>
+                <a:latin typeface="Calibri" pitchFamily="34" charset="0"/>
+                <a:ea typeface="Calibri" pitchFamily="34" charset="-122"/>
+                <a:cs typeface="Calibri" pitchFamily="34" charset="-120"/>
+              </a:rPr>
+              <a:t>systematic</a:t>
+            </a:r>
             <a:r>
               <a:rPr lang="en-US" sz="1100" dirty="0">
                 <a:solidFill>
@@ -4922,9 +4467,8 @@
                 <a:ea typeface="Calibri" pitchFamily="34" charset="-122"/>
                 <a:cs typeface="Calibri" pitchFamily="34" charset="-120"/>
               </a:rPr>
-              <a:t>[Are there systematic failure modes (e.g., rare subgroups)?]</a:t>
-            </a:r>
-            <a:endParaRPr lang="en-US" sz="1100" dirty="0"/>
+              <a:t>, not random: misclassifications cluster around the stylometric decision boundary, confirming a known architectural limit of TF-IDF pipelines</a:t>
+            </a:r>
           </a:p>
         </p:txBody>
       </p:sp>
@@ -4936,7 +4480,7 @@
         </p:nvSpPr>
         <p:spPr>
           <a:xfrm>
-            <a:off x="411480" y="3703320"/>
+            <a:off x="411480" y="3698749"/>
             <a:ext cx="8321040" cy="1170432"/>
           </a:xfrm>
           <a:prstGeom prst="roundRect">
@@ -5002,7 +4546,7 @@
                 <a:ea typeface="Calibri" pitchFamily="34" charset="-122"/>
                 <a:cs typeface="Calibri" pitchFamily="34" charset="-120"/>
               </a:rPr>
-              <a:t>Comparison with Prior Work (if applicable)</a:t>
+              <a:t>Comparison with Prior Work</a:t>
             </a:r>
             <a:endParaRPr lang="en-US" sz="1100" dirty="0"/>
           </a:p>
@@ -5033,7 +4577,7 @@
               <a:buNone/>
             </a:pPr>
             <a:r>
-              <a:rPr lang="en-US" sz="1050" i="1" dirty="0">
+              <a:rPr lang="it-IT" sz="1100" b="1" dirty="0">
                 <a:solidFill>
                   <a:srgbClr val="1E293B"/>
                 </a:solidFill>
@@ -5041,12 +4585,104 @@
                 <a:ea typeface="Calibri" pitchFamily="34" charset="-122"/>
                 <a:cs typeface="Calibri" pitchFamily="34" charset="-120"/>
               </a:rPr>
-              <a:t>[If a published baseline exists for the same task, compare results. If your numbers differ, formulate explicit hypotheses: different feature sets? different train/test split? class imbalance handling? State clearly what you know and what you speculate.]</a:t>
-            </a:r>
-            <a:endParaRPr lang="en-US" sz="1050" dirty="0"/>
-          </a:p>
-        </p:txBody>
-      </p:sp>
+              <a:t>Verma</a:t>
+            </a:r>
+            <a:r>
+              <a:rPr lang="it-IT" sz="1100" dirty="0">
+                <a:solidFill>
+                  <a:srgbClr val="1E293B"/>
+                </a:solidFill>
+                <a:latin typeface="Calibri" pitchFamily="34" charset="0"/>
+                <a:ea typeface="Calibri" pitchFamily="34" charset="-122"/>
+                <a:cs typeface="Calibri" pitchFamily="34" charset="-120"/>
+              </a:rPr>
+              <a:t> et al. (2021) — the original WELFake paper — reports ~</a:t>
+            </a:r>
+            <a:r>
+              <a:rPr lang="it-IT" sz="1100" b="1" dirty="0">
+                <a:solidFill>
+                  <a:srgbClr val="1E293B"/>
+                </a:solidFill>
+                <a:latin typeface="Calibri" pitchFamily="34" charset="0"/>
+                <a:ea typeface="Calibri" pitchFamily="34" charset="-122"/>
+                <a:cs typeface="Calibri" pitchFamily="34" charset="-120"/>
+              </a:rPr>
+              <a:t>95% accuracy </a:t>
+            </a:r>
+            <a:r>
+              <a:rPr lang="it-IT" sz="1100" dirty="0">
+                <a:solidFill>
+                  <a:srgbClr val="1E293B"/>
+                </a:solidFill>
+                <a:latin typeface="Calibri" pitchFamily="34" charset="0"/>
+                <a:ea typeface="Calibri" pitchFamily="34" charset="-122"/>
+                <a:cs typeface="Calibri" pitchFamily="34" charset="-120"/>
+              </a:rPr>
+              <a:t>using word embeddings combined with 20 hand-crafted linguistic features. Our LightGBM pipeline achieves </a:t>
+            </a:r>
+            <a:r>
+              <a:rPr lang="it-IT" sz="1100" b="1" dirty="0">
+                <a:solidFill>
+                  <a:srgbClr val="1E293B"/>
+                </a:solidFill>
+                <a:latin typeface="Calibri" pitchFamily="34" charset="0"/>
+                <a:ea typeface="Calibri" pitchFamily="34" charset="-122"/>
+                <a:cs typeface="Calibri" pitchFamily="34" charset="-120"/>
+              </a:rPr>
+              <a:t>97.9%</a:t>
+            </a:r>
+            <a:r>
+              <a:rPr lang="it-IT" sz="1100" dirty="0">
+                <a:solidFill>
+                  <a:srgbClr val="1E293B"/>
+                </a:solidFill>
+                <a:latin typeface="Calibri" pitchFamily="34" charset="0"/>
+                <a:ea typeface="Calibri" pitchFamily="34" charset="-122"/>
+                <a:cs typeface="Calibri" pitchFamily="34" charset="-120"/>
+              </a:rPr>
+              <a:t> with a simpler approach: TF-IDF + only 5 stylometric features. We outperform the dataset authors' own benchmark while maintaining full interpretability via SHAP.</a:t>
+            </a:r>
+            <a:endParaRPr lang="en-US" sz="1100" dirty="0">
+              <a:solidFill>
+                <a:srgbClr val="1E293B"/>
+              </a:solidFill>
+              <a:latin typeface="Calibri" pitchFamily="34" charset="0"/>
+              <a:ea typeface="Calibri" pitchFamily="34" charset="-122"/>
+              <a:cs typeface="Calibri" pitchFamily="34" charset="-120"/>
+            </a:endParaRPr>
+          </a:p>
+        </p:txBody>
+      </p:sp>
+      <p:pic>
+        <p:nvPicPr>
+          <p:cNvPr id="14" name="Picture 13" descr="A graph with numbers and symbols&#10;&#10;AI-generated content may be incorrect.">
+            <a:extLst>
+              <a:ext uri="{FF2B5EF4-FFF2-40B4-BE49-F238E27FC236}">
+                <a16:creationId xmlns:a16="http://schemas.microsoft.com/office/drawing/2014/main" id="{DA5D9E58-2A7A-A520-C977-1344C260BE04}"/>
+              </a:ext>
+            </a:extLst>
+          </p:cNvPr>
+          <p:cNvPicPr>
+            <a:picLocks noChangeAspect="1"/>
+          </p:cNvPicPr>
+          <p:nvPr/>
+        </p:nvPicPr>
+        <p:blipFill>
+          <a:blip r:embed="rId3"/>
+          <a:stretch>
+            <a:fillRect/>
+          </a:stretch>
+        </p:blipFill>
+        <p:spPr>
+          <a:xfrm>
+            <a:off x="654353" y="1097280"/>
+            <a:ext cx="3229800" cy="2555095"/>
+          </a:xfrm>
+          <a:prstGeom prst="rect">
+            <a:avLst/>
+          </a:prstGeom>
+        </p:spPr>
+      </p:pic>
     </p:spTree>
   </p:cSld>
   <p:clrMapOvr>
@@ -6197,9 +5833,8 @@
                 <a:ea typeface="Calibri" pitchFamily="34" charset="-122"/>
                 <a:cs typeface="Calibri" pitchFamily="34" charset="-120"/>
               </a:rPr>
-              <a:t>[One-sentence summary of the problem and task]</a:t>
-            </a:r>
-            <a:endParaRPr lang="en-US" sz="1200" dirty="0"/>
+              <a:t>Problem: automated binary classification of news articles to combat digital misinformation, using semantic and stylometric features</a:t>
+            </a:r>
           </a:p>
           <a:p>
             <a:pPr marL="342900" indent="-342900">
@@ -6218,9 +5853,52 @@
                 <a:ea typeface="Calibri" pitchFamily="34" charset="-122"/>
                 <a:cs typeface="Calibri" pitchFamily="34" charset="-120"/>
               </a:rPr>
-              <a:t>[The best model chosen and how it was validated]</a:t>
-            </a:r>
-            <a:endParaRPr lang="en-US" sz="1200" dirty="0"/>
+              <a:t>Best model: </a:t>
+            </a:r>
+            <a:r>
+              <a:rPr lang="en-US" sz="1200" dirty="0" err="1">
+                <a:solidFill>
+                  <a:srgbClr val="FFFFFF"/>
+                </a:solidFill>
+                <a:latin typeface="Calibri" pitchFamily="34" charset="0"/>
+                <a:ea typeface="Calibri" pitchFamily="34" charset="-122"/>
+                <a:cs typeface="Calibri" pitchFamily="34" charset="-120"/>
+              </a:rPr>
+              <a:t>LightGBM</a:t>
+            </a:r>
+            <a:r>
+              <a:rPr lang="en-US" sz="1200" dirty="0">
+                <a:solidFill>
+                  <a:srgbClr val="FFFFFF"/>
+                </a:solidFill>
+                <a:latin typeface="Calibri" pitchFamily="34" charset="0"/>
+                <a:ea typeface="Calibri" pitchFamily="34" charset="-122"/>
+                <a:cs typeface="Calibri" pitchFamily="34" charset="-120"/>
+              </a:rPr>
+              <a:t> — 97.9% accuracy and F1, validated via Stratified 5-Fold CV and confirmed statistically superior to Linear SVM (</a:t>
+            </a:r>
+            <a:r>
+              <a:rPr lang="en-US" sz="1200" dirty="0" err="1">
+                <a:solidFill>
+                  <a:srgbClr val="FFFFFF"/>
+                </a:solidFill>
+                <a:latin typeface="Calibri" pitchFamily="34" charset="0"/>
+                <a:ea typeface="Calibri" pitchFamily="34" charset="-122"/>
+                <a:cs typeface="Calibri" pitchFamily="34" charset="-120"/>
+              </a:rPr>
+              <a:t>McNemar's</a:t>
+            </a:r>
+            <a:r>
+              <a:rPr lang="en-US" sz="1200" dirty="0">
+                <a:solidFill>
+                  <a:srgbClr val="FFFFFF"/>
+                </a:solidFill>
+                <a:latin typeface="Calibri" pitchFamily="34" charset="0"/>
+                <a:ea typeface="Calibri" pitchFamily="34" charset="-122"/>
+                <a:cs typeface="Calibri" pitchFamily="34" charset="-120"/>
+              </a:rPr>
+              <a:t>, p=0.00016)</a:t>
+            </a:r>
           </a:p>
           <a:p>
             <a:pPr marL="342900" indent="-342900">
@@ -6239,9 +5917,52 @@
                 <a:ea typeface="Calibri" pitchFamily="34" charset="-122"/>
                 <a:cs typeface="Calibri" pitchFamily="34" charset="-120"/>
               </a:rPr>
-              <a:t>[The most interesting finding from explainability or error analysis]</a:t>
-            </a:r>
-            <a:endParaRPr lang="en-US" sz="1200" dirty="0"/>
+              <a:t>Key XAI finding: SHAP reveals the model learned journalistically meaningful signals — source tokens (</a:t>
+            </a:r>
+            <a:r>
+              <a:rPr lang="en-US" sz="1200" dirty="0" err="1">
+                <a:solidFill>
+                  <a:srgbClr val="FFFFFF"/>
+                </a:solidFill>
+                <a:latin typeface="Calibri" pitchFamily="34" charset="0"/>
+                <a:ea typeface="Calibri" pitchFamily="34" charset="-122"/>
+                <a:cs typeface="Calibri" pitchFamily="34" charset="-120"/>
+              </a:rPr>
+              <a:t>breitbart</a:t>
+            </a:r>
+            <a:r>
+              <a:rPr lang="en-US" sz="1200" dirty="0">
+                <a:solidFill>
+                  <a:srgbClr val="FFFFFF"/>
+                </a:solidFill>
+                <a:latin typeface="Calibri" pitchFamily="34" charset="0"/>
+                <a:ea typeface="Calibri" pitchFamily="34" charset="-122"/>
+                <a:cs typeface="Calibri" pitchFamily="34" charset="-120"/>
+              </a:rPr>
+              <a:t>, </a:t>
+            </a:r>
+            <a:r>
+              <a:rPr lang="en-US" sz="1200" dirty="0" err="1">
+                <a:solidFill>
+                  <a:srgbClr val="FFFFFF"/>
+                </a:solidFill>
+                <a:latin typeface="Calibri" pitchFamily="34" charset="0"/>
+                <a:ea typeface="Calibri" pitchFamily="34" charset="-122"/>
+                <a:cs typeface="Calibri" pitchFamily="34" charset="-120"/>
+              </a:rPr>
+              <a:t>reuters</a:t>
+            </a:r>
+            <a:r>
+              <a:rPr lang="en-US" sz="1200" dirty="0">
+                <a:solidFill>
+                  <a:srgbClr val="FFFFFF"/>
+                </a:solidFill>
+                <a:latin typeface="Calibri" pitchFamily="34" charset="0"/>
+                <a:ea typeface="Calibri" pitchFamily="34" charset="-122"/>
+                <a:cs typeface="Calibri" pitchFamily="34" charset="-120"/>
+              </a:rPr>
+              <a:t>) and sensationalist stylometry — not dataset artifacts, confirming genuine generalization</a:t>
+            </a:r>
           </a:p>
           <a:p>
             <a:pPr marL="342900" indent="-342900">
@@ -6260,9 +5981,30 @@
                 <a:ea typeface="Calibri" pitchFamily="34" charset="-122"/>
                 <a:cs typeface="Calibri" pitchFamily="34" charset="-120"/>
               </a:rPr>
-              <a:t>[The most important limitation and next step]</a:t>
-            </a:r>
-            <a:endParaRPr lang="en-US" sz="1200" dirty="0"/>
+              <a:t>Main limitation &amp; next step: TF-IDF cannot distinguish writing style from factual content; future work should explore transformer-based architectures (BERT, </a:t>
+            </a:r>
+            <a:r>
+              <a:rPr lang="en-US" sz="1200" dirty="0" err="1">
+                <a:solidFill>
+                  <a:srgbClr val="FFFFFF"/>
+                </a:solidFill>
+                <a:latin typeface="Calibri" pitchFamily="34" charset="0"/>
+                <a:ea typeface="Calibri" pitchFamily="34" charset="-122"/>
+                <a:cs typeface="Calibri" pitchFamily="34" charset="-120"/>
+              </a:rPr>
+              <a:t>RoBERTa</a:t>
+            </a:r>
+            <a:r>
+              <a:rPr lang="en-US" sz="1200" dirty="0">
+                <a:solidFill>
+                  <a:srgbClr val="FFFFFF"/>
+                </a:solidFill>
+                <a:latin typeface="Calibri" pitchFamily="34" charset="0"/>
+                <a:ea typeface="Calibri" pitchFamily="34" charset="-122"/>
+                <a:cs typeface="Calibri" pitchFamily="34" charset="-120"/>
+              </a:rPr>
+              <a:t>) for deep contextual understanding</a:t>
+            </a:r>
           </a:p>
         </p:txBody>
       </p:sp>
@@ -6274,7 +6016,7 @@
         </p:nvSpPr>
         <p:spPr>
           <a:xfrm>
-            <a:off x="411480" y="3703320"/>
+            <a:off x="411480" y="3938449"/>
             <a:ext cx="8321040" cy="13716"/>
           </a:xfrm>
           <a:prstGeom prst="rect">
@@ -6306,7 +6048,7 @@
         </p:nvSpPr>
         <p:spPr>
           <a:xfrm>
-            <a:off x="411480" y="3840480"/>
+            <a:off x="411480" y="4108267"/>
             <a:ext cx="8321040" cy="256032"/>
           </a:xfrm>
           <a:prstGeom prst="rect">
@@ -6331,9 +6073,21 @@
                 <a:ea typeface="Calibri" pitchFamily="34" charset="-122"/>
                 <a:cs typeface="Calibri" pitchFamily="34" charset="-120"/>
               </a:rPr>
-              <a:t>[FirstName LastName]   ·   [email@domain.com]</a:t>
-            </a:r>
-            <a:endParaRPr lang="en-US" sz="1050" dirty="0"/>
+              <a:t>Alessio Grillo   ·   a.grillo6@studenti.unipi.it</a:t>
+            </a:r>
+          </a:p>
+          <a:p>
+            <a:r>
+              <a:rPr lang="en-US" sz="1050" dirty="0">
+                <a:solidFill>
+                  <a:srgbClr val="4A6587"/>
+                </a:solidFill>
+                <a:latin typeface="Calibri" pitchFamily="34" charset="0"/>
+                <a:ea typeface="Calibri" pitchFamily="34" charset="-122"/>
+                <a:cs typeface="Calibri" pitchFamily="34" charset="-120"/>
+              </a:rPr>
+              <a:t>Andrea Giacomazzi   ·   a.giacomazzi1@studenti.unipi.it</a:t>
+            </a:r>
           </a:p>
         </p:txBody>
       </p:sp>
@@ -9885,14 +9639,14 @@
       </p:sp>
       <p:sp>
         <p:nvSpPr>
-          <p:cNvPr id="9" name="Text 7"/>
-          <p:cNvSpPr/>
-          <p:nvPr/>
-        </p:nvSpPr>
-        <p:spPr>
-          <a:xfrm>
-            <a:off x="4663440" y="1897380"/>
-            <a:ext cx="4069080" cy="969264"/>
+          <p:cNvPr id="13" name="Text 11"/>
+          <p:cNvSpPr/>
+          <p:nvPr/>
+        </p:nvSpPr>
+        <p:spPr>
+          <a:xfrm>
+            <a:off x="411480" y="4345885"/>
+            <a:ext cx="8321040" cy="201168"/>
           </a:xfrm>
           <a:prstGeom prst="rect">
             <a:avLst/>
@@ -9902,142 +9656,36 @@
         </p:spPr>
         <p:txBody>
           <a:bodyPr wrap="square" lIns="0" tIns="0" rIns="0" bIns="0" rtlCol="0" anchor="ctr"/>
-          <a:lstStyle/>
-          <a:p>
-            <a:pPr marL="0" indent="0" algn="ctr">
-              <a:buNone/>
-            </a:pPr>
-            <a:r>
-              <a:rPr lang="en-US" sz="1100" i="1" dirty="0">
-                <a:solidFill>
-                  <a:srgbClr val="7A8FA6"/>
-                </a:solidFill>
-              </a:rPr>
-              <a:t>[ YOUR FIGURE HERE ]</a:t>
-            </a:r>
-            <a:endParaRPr lang="en-US" sz="1100" dirty="0"/>
-          </a:p>
-        </p:txBody>
-      </p:sp>
-      <p:sp>
-        <p:nvSpPr>
-          <p:cNvPr id="10" name="Text 8"/>
-          <p:cNvSpPr/>
-          <p:nvPr/>
-        </p:nvSpPr>
-        <p:spPr>
-          <a:xfrm>
-            <a:off x="4663440" y="2672791"/>
-            <a:ext cx="4069080" cy="775411"/>
-          </a:xfrm>
-          <a:prstGeom prst="rect">
-            <a:avLst/>
-          </a:prstGeom>
-          <a:noFill/>
-          <a:ln/>
-        </p:spPr>
-        <p:txBody>
-          <a:bodyPr wrap="square" lIns="0" tIns="0" rIns="0" bIns="0" rtlCol="0" anchor="t"/>
-          <a:lstStyle/>
-          <a:p>
-            <a:pPr marL="0" indent="0" algn="ctr">
-              <a:buNone/>
-            </a:pPr>
-            <a:r>
-              <a:rPr lang="en-US" sz="850" dirty="0">
-                <a:solidFill>
-                  <a:srgbClr val="7A8FA6"/>
-                </a:solidFill>
-              </a:rPr>
-              <a:t>Correlation heatmap or scatter matrix</a:t>
-            </a:r>
-            <a:endParaRPr lang="en-US" sz="850" dirty="0"/>
-          </a:p>
-        </p:txBody>
-      </p:sp>
-      <p:sp>
-        <p:nvSpPr>
-          <p:cNvPr id="11" name="Shape 9"/>
-          <p:cNvSpPr/>
-          <p:nvPr/>
-        </p:nvSpPr>
-        <p:spPr>
-          <a:xfrm>
-            <a:off x="156755" y="4213937"/>
-            <a:ext cx="8321040" cy="713232"/>
-          </a:xfrm>
-          <a:prstGeom prst="roundRect">
-            <a:avLst>
-              <a:gd name="adj" fmla="val 10256"/>
-            </a:avLst>
-          </a:prstGeom>
-          <a:solidFill>
-            <a:srgbClr val="E8F4FD"/>
-          </a:solidFill>
-          <a:ln w="12700">
-            <a:solidFill>
-              <a:srgbClr val="93C5E0"/>
-            </a:solidFill>
-            <a:prstDash val="solid"/>
-          </a:ln>
-        </p:spPr>
-        <p:txBody>
-          <a:bodyPr/>
-          <a:lstStyle/>
-          <a:p>
-            <a:endParaRPr lang="it-IT"/>
-          </a:p>
-        </p:txBody>
-      </p:sp>
-      <p:sp>
-        <p:nvSpPr>
-          <p:cNvPr id="12" name="Text 10"/>
-          <p:cNvSpPr/>
-          <p:nvPr/>
-        </p:nvSpPr>
-        <p:spPr>
-          <a:xfrm>
-            <a:off x="156755" y="4085921"/>
-            <a:ext cx="8065008" cy="566928"/>
-          </a:xfrm>
-          <a:prstGeom prst="rect">
-            <a:avLst/>
-          </a:prstGeom>
-          <a:noFill/>
-          <a:ln/>
-        </p:spPr>
-        <p:txBody>
-          <a:bodyPr wrap="square" lIns="0" tIns="0" rIns="0" bIns="0" rtlCol="0" anchor="t"/>
           <a:lstStyle/>
           <a:p>
             <a:pPr marL="0" indent="0">
               <a:buNone/>
             </a:pPr>
             <a:r>
-              <a:rPr lang="en-US" sz="950" i="1" dirty="0">
-                <a:solidFill>
-                  <a:srgbClr val="1E5A82"/>
-                </a:solidFill>
-                <a:latin typeface="Calibri" pitchFamily="34" charset="0"/>
-                <a:ea typeface="Calibri" pitchFamily="34" charset="-122"/>
-                <a:cs typeface="Calibri" pitchFamily="34" charset="-120"/>
-              </a:rPr>
-              <a:t>Highlight the most informative findings: class imbalance, notable correlations, missing-value patterns (report % overall and per class). These observations should motivate your preprocessing choices in the next slide.</a:t>
-            </a:r>
-            <a:endParaRPr lang="en-US" sz="950" dirty="0"/>
-          </a:p>
-        </p:txBody>
-      </p:sp>
-      <p:sp>
-        <p:nvSpPr>
-          <p:cNvPr id="13" name="Text 11"/>
-          <p:cNvSpPr/>
-          <p:nvPr/>
-        </p:nvSpPr>
-        <p:spPr>
-          <a:xfrm>
-            <a:off x="411480" y="4480560"/>
-            <a:ext cx="8321040" cy="201168"/>
+              <a:rPr lang="en-US" sz="1000" b="1" dirty="0">
+                <a:solidFill>
+                  <a:srgbClr val="1C2B4A"/>
+                </a:solidFill>
+                <a:latin typeface="Calibri" pitchFamily="34" charset="0"/>
+                <a:ea typeface="Calibri" pitchFamily="34" charset="-122"/>
+                <a:cs typeface="Calibri" pitchFamily="34" charset="-120"/>
+              </a:rPr>
+              <a:t>Key findings from EDA:</a:t>
+            </a:r>
+            <a:endParaRPr lang="en-US" sz="1000" dirty="0"/>
+          </a:p>
+        </p:txBody>
+      </p:sp>
+      <p:sp>
+        <p:nvSpPr>
+          <p:cNvPr id="14" name="Text 12"/>
+          <p:cNvSpPr/>
+          <p:nvPr/>
+        </p:nvSpPr>
+        <p:spPr>
+          <a:xfrm>
+            <a:off x="411480" y="4624523"/>
+            <a:ext cx="8321040" cy="274320"/>
           </a:xfrm>
           <a:prstGeom prst="rect">
             <a:avLst/>
@@ -10052,90 +9700,10 @@
             <a:pPr marL="0" indent="0">
               <a:buNone/>
             </a:pPr>
-            <a:r>
-              <a:rPr lang="en-US" sz="1000" b="1" dirty="0">
-                <a:solidFill>
-                  <a:srgbClr val="1C2B4A"/>
-                </a:solidFill>
-                <a:latin typeface="Calibri" pitchFamily="34" charset="0"/>
-                <a:ea typeface="Calibri" pitchFamily="34" charset="-122"/>
-                <a:cs typeface="Calibri" pitchFamily="34" charset="-120"/>
-              </a:rPr>
-              <a:t>Key findings from EDA:</a:t>
-            </a:r>
-            <a:endParaRPr lang="en-US" sz="1000" dirty="0"/>
-          </a:p>
-        </p:txBody>
-      </p:sp>
-      <p:sp>
-        <p:nvSpPr>
-          <p:cNvPr id="14" name="Text 12"/>
-          <p:cNvSpPr/>
-          <p:nvPr/>
-        </p:nvSpPr>
-        <p:spPr>
-          <a:xfrm>
-            <a:off x="411480" y="4709160"/>
-            <a:ext cx="8321040" cy="274320"/>
-          </a:xfrm>
-          <a:prstGeom prst="rect">
-            <a:avLst/>
-          </a:prstGeom>
-          <a:noFill/>
-          <a:ln/>
-        </p:spPr>
-        <p:txBody>
-          <a:bodyPr wrap="square" lIns="0" tIns="0" rIns="0" bIns="0" rtlCol="0" anchor="ctr"/>
-          <a:lstStyle/>
-          <a:p>
-            <a:pPr marL="0" indent="0">
-              <a:buNone/>
-            </a:pPr>
-            <a:r>
-              <a:rPr lang="en-US" sz="950" i="1" dirty="0">
-                <a:solidFill>
-                  <a:srgbClr val="7A8FA6"/>
-                </a:solidFill>
-                <a:latin typeface="Calibri" pitchFamily="34" charset="0"/>
-                <a:ea typeface="Calibri" pitchFamily="34" charset="-122"/>
-                <a:cs typeface="Calibri" pitchFamily="34" charset="-120"/>
-              </a:rPr>
-              <a:t>[Summarize 2–3 key observations in one sentence each — e.g., class imbalance ratio, most correlated features, missing-value distribution]</a:t>
-            </a:r>
             <a:endParaRPr lang="en-US" sz="950" dirty="0"/>
           </a:p>
         </p:txBody>
       </p:sp>
-      <p:pic>
-        <p:nvPicPr>
-          <p:cNvPr id="16" name="Picture 15" descr="A diagram of a heatmap&#10;&#10;AI-generated content may be incorrect.">
-            <a:extLst>
-              <a:ext uri="{FF2B5EF4-FFF2-40B4-BE49-F238E27FC236}">
-                <a16:creationId xmlns:a16="http://schemas.microsoft.com/office/drawing/2014/main" id="{345894B8-56C9-A952-CB03-69BA066AF89B}"/>
-              </a:ext>
-            </a:extLst>
-          </p:cNvPr>
-          <p:cNvPicPr>
-            <a:picLocks noChangeAspect="1"/>
-          </p:cNvPicPr>
-          <p:nvPr/>
-        </p:nvPicPr>
-        <p:blipFill>
-          <a:blip r:embed="rId3"/>
-          <a:stretch>
-            <a:fillRect/>
-          </a:stretch>
-        </p:blipFill>
-        <p:spPr>
-          <a:xfrm>
-            <a:off x="5006534" y="866198"/>
-            <a:ext cx="3908866" cy="3462810"/>
-          </a:xfrm>
-          <a:prstGeom prst="rect">
-            <a:avLst/>
-          </a:prstGeom>
-        </p:spPr>
-      </p:pic>
       <p:pic>
         <p:nvPicPr>
           <p:cNvPr id="22" name="Picture 21" descr="A graph of different colored lines&#10;&#10;AI-generated content may be incorrect.">
@@ -10151,6 +9719,36 @@
           <p:nvPr/>
         </p:nvPicPr>
         <p:blipFill>
+          <a:blip r:embed="rId3"/>
+          <a:stretch>
+            <a:fillRect/>
+          </a:stretch>
+        </p:blipFill>
+        <p:spPr>
+          <a:xfrm>
+            <a:off x="6073" y="1286307"/>
+            <a:ext cx="5000461" cy="2649673"/>
+          </a:xfrm>
+          <a:prstGeom prst="rect">
+            <a:avLst/>
+          </a:prstGeom>
+        </p:spPr>
+      </p:pic>
+      <p:pic>
+        <p:nvPicPr>
+          <p:cNvPr id="8" name="Picture 7" descr="A screenshot of a graph&#10;&#10;AI-generated content may be incorrect.">
+            <a:extLst>
+              <a:ext uri="{FF2B5EF4-FFF2-40B4-BE49-F238E27FC236}">
+                <a16:creationId xmlns:a16="http://schemas.microsoft.com/office/drawing/2014/main" id="{98053734-F748-540B-5315-B958720CD41A}"/>
+              </a:ext>
+            </a:extLst>
+          </p:cNvPr>
+          <p:cNvPicPr>
+            <a:picLocks noChangeAspect="1"/>
+          </p:cNvPicPr>
+          <p:nvPr/>
+        </p:nvPicPr>
+        <p:blipFill>
           <a:blip r:embed="rId4"/>
           <a:stretch>
             <a:fillRect/>
@@ -10158,8 +9756,8 @@
         </p:blipFill>
         <p:spPr>
           <a:xfrm>
-            <a:off x="6073" y="1286307"/>
-            <a:ext cx="5000461" cy="2649673"/>
+            <a:off x="5021327" y="986589"/>
+            <a:ext cx="3974180" cy="2949391"/>
           </a:xfrm>
           <a:prstGeom prst="rect">
             <a:avLst/>
@@ -12875,126 +12473,6 @@
       </p:sp>
       <p:sp>
         <p:nvSpPr>
-          <p:cNvPr id="5" name="Shape 3"/>
-          <p:cNvSpPr/>
-          <p:nvPr/>
-        </p:nvSpPr>
-        <p:spPr>
-          <a:xfrm>
-            <a:off x="411480" y="1170432"/>
-            <a:ext cx="4069080" cy="2331720"/>
-          </a:xfrm>
-          <a:prstGeom prst="roundRect">
-            <a:avLst>
-              <a:gd name="adj" fmla="val 3137"/>
-            </a:avLst>
-          </a:prstGeom>
-          <a:solidFill>
-            <a:srgbClr val="F0F4FA"/>
-          </a:solidFill>
-          <a:ln w="15240">
-            <a:solidFill>
-              <a:srgbClr val="CBD5E1"/>
-            </a:solidFill>
-            <a:prstDash val="dash"/>
-          </a:ln>
-        </p:spPr>
-        <p:txBody>
-          <a:bodyPr/>
-          <a:lstStyle/>
-          <a:p>
-            <a:endParaRPr lang="it-IT"/>
-          </a:p>
-        </p:txBody>
-      </p:sp>
-      <p:sp>
-        <p:nvSpPr>
-          <p:cNvPr id="6" name="Text 4"/>
-          <p:cNvSpPr/>
-          <p:nvPr/>
-        </p:nvSpPr>
-        <p:spPr>
-          <a:xfrm>
-            <a:off x="411480" y="1869948"/>
-            <a:ext cx="4069080" cy="932688"/>
-          </a:xfrm>
-          <a:prstGeom prst="rect">
-            <a:avLst/>
-          </a:prstGeom>
-          <a:noFill/>
-          <a:ln/>
-        </p:spPr>
-        <p:txBody>
-          <a:bodyPr wrap="square" lIns="0" tIns="0" rIns="0" bIns="0" rtlCol="0" anchor="ctr"/>
-          <a:lstStyle/>
-          <a:p>
-            <a:pPr marL="0" indent="0" algn="ctr">
-              <a:buNone/>
-            </a:pPr>
-            <a:r>
-              <a:rPr lang="en-US" sz="1100" i="1" dirty="0">
-                <a:solidFill>
-                  <a:srgbClr val="7A8FA6"/>
-                </a:solidFill>
-              </a:rPr>
-              <a:t>[ YOUR FIGURE HERE ]</a:t>
-            </a:r>
-            <a:endParaRPr lang="en-US" sz="1100" dirty="0"/>
-          </a:p>
-        </p:txBody>
-      </p:sp>
-      <p:sp>
-        <p:nvSpPr>
-          <p:cNvPr id="7" name="Text 5"/>
-          <p:cNvSpPr/>
-          <p:nvPr/>
-        </p:nvSpPr>
-        <p:spPr>
-          <a:xfrm>
-            <a:off x="411480" y="2616098"/>
-            <a:ext cx="4069080" cy="746150"/>
-          </a:xfrm>
-          <a:prstGeom prst="rect">
-            <a:avLst/>
-          </a:prstGeom>
-          <a:noFill/>
-          <a:ln/>
-        </p:spPr>
-        <p:txBody>
-          <a:bodyPr wrap="square" lIns="0" tIns="0" rIns="0" bIns="0" rtlCol="0" anchor="t"/>
-          <a:lstStyle/>
-          <a:p>
-            <a:pPr marL="0" indent="0" algn="ctr">
-              <a:buNone/>
-            </a:pPr>
-            <a:r>
-              <a:rPr lang="en-US" sz="850" dirty="0">
-                <a:solidFill>
-                  <a:srgbClr val="7A8FA6"/>
-                </a:solidFill>
-              </a:rPr>
-              <a:t>Box plot of cross-validated scores across candidate models</a:t>
-            </a:r>
-            <a:endParaRPr lang="en-US" sz="850" dirty="0"/>
-          </a:p>
-          <a:p>
-            <a:pPr marL="0" indent="0" algn="ctr">
-              <a:buNone/>
-            </a:pPr>
-            <a:r>
-              <a:rPr lang="en-US" sz="850" dirty="0">
-                <a:solidFill>
-                  <a:srgbClr val="7A8FA6"/>
-                </a:solidFill>
-              </a:rPr>
-              <a:t>(e.g., F1-macro or RMSE per CV fold per model)</a:t>
-            </a:r>
-            <a:endParaRPr lang="en-US" sz="850" dirty="0"/>
-          </a:p>
-        </p:txBody>
-      </p:sp>
-      <p:sp>
-        <p:nvSpPr>
           <p:cNvPr id="8" name="Shape 6"/>
           <p:cNvSpPr/>
           <p:nvPr/>
@@ -13185,7 +12663,7 @@
         <p:spPr>
           <a:xfrm>
             <a:off x="6263640" y="1554480"/>
-            <a:ext cx="2377440" cy="201168"/>
+            <a:ext cx="2468880" cy="201168"/>
           </a:xfrm>
           <a:prstGeom prst="rect">
             <a:avLst/>
@@ -13201,7 +12679,7 @@
               <a:buNone/>
             </a:pPr>
             <a:r>
-              <a:rPr lang="en-US" sz="950" i="1" dirty="0">
+              <a:rPr lang="en-US" sz="700" i="1" dirty="0">
                 <a:solidFill>
                   <a:srgbClr val="4A6587"/>
                 </a:solidFill>
@@ -13209,9 +12687,30 @@
                 <a:ea typeface="Calibri" pitchFamily="34" charset="-122"/>
                 <a:cs typeface="Calibri" pitchFamily="34" charset="-120"/>
               </a:rPr>
-              <a:t>[list model families considered and why]</a:t>
-            </a:r>
-            <a:endParaRPr lang="en-US" sz="950" dirty="0"/>
+              <a:t>Linear baseline (LR, NB, SVM) + ensemble (RF, AdaBoost, </a:t>
+            </a:r>
+            <a:r>
+              <a:rPr lang="en-US" sz="700" i="1" dirty="0" err="1">
+                <a:solidFill>
+                  <a:srgbClr val="4A6587"/>
+                </a:solidFill>
+                <a:latin typeface="Calibri" pitchFamily="34" charset="0"/>
+                <a:ea typeface="Calibri" pitchFamily="34" charset="-122"/>
+                <a:cs typeface="Calibri" pitchFamily="34" charset="-120"/>
+              </a:rPr>
+              <a:t>LightGBM</a:t>
+            </a:r>
+            <a:r>
+              <a:rPr lang="en-US" sz="700" i="1" dirty="0">
+                <a:solidFill>
+                  <a:srgbClr val="4A6587"/>
+                </a:solidFill>
+                <a:latin typeface="Calibri" pitchFamily="34" charset="0"/>
+                <a:ea typeface="Calibri" pitchFamily="34" charset="-122"/>
+                <a:cs typeface="Calibri" pitchFamily="34" charset="-120"/>
+              </a:rPr>
+              <a:t>)  covering linear, probabilistic, geometric and boosting families</a:t>
+            </a:r>
           </a:p>
         </p:txBody>
       </p:sp>
@@ -13436,7 +12935,7 @@
                 <a:ea typeface="Calibri" pitchFamily="34" charset="-122"/>
                 <a:cs typeface="Calibri" pitchFamily="34" charset="-120"/>
               </a:rPr>
-              <a:t>[metric used to compare models]</a:t>
+              <a:t>Accuracy</a:t>
             </a:r>
             <a:endParaRPr lang="en-US" sz="950" dirty="0"/>
           </a:p>
@@ -13538,6 +13037,17 @@
               <a:buNone/>
             </a:pPr>
             <a:r>
+              <a:rPr lang="en-US" sz="950" i="1" dirty="0" err="1">
+                <a:solidFill>
+                  <a:srgbClr val="4A6587"/>
+                </a:solidFill>
+                <a:latin typeface="Calibri" pitchFamily="34" charset="0"/>
+                <a:ea typeface="Calibri" pitchFamily="34" charset="-122"/>
+                <a:cs typeface="Calibri" pitchFamily="34" charset="-120"/>
+              </a:rPr>
+              <a:t>LightGBM</a:t>
+            </a:r>
+            <a:r>
               <a:rPr lang="en-US" sz="950" i="1" dirty="0">
                 <a:solidFill>
                   <a:srgbClr val="4A6587"/>
@@ -13546,9 +13056,8 @@
                 <a:ea typeface="Calibri" pitchFamily="34" charset="-122"/>
                 <a:cs typeface="Calibri" pitchFamily="34" charset="-120"/>
               </a:rPr>
-              <a:t>[best family and justification]</a:t>
-            </a:r>
-            <a:endParaRPr lang="en-US" sz="950" dirty="0"/>
+              <a:t> — highest CV accuracy (0.978) with lowest variance</a:t>
+            </a:r>
           </a:p>
         </p:txBody>
       </p:sp>
@@ -13656,9 +13165,8 @@
                 <a:ea typeface="Calibri" pitchFamily="34" charset="-122"/>
                 <a:cs typeface="Calibri" pitchFamily="34" charset="-120"/>
               </a:rPr>
-              <a:t>[Grid / Random / Bayesian search]</a:t>
-            </a:r>
-            <a:endParaRPr lang="en-US" sz="950" dirty="0"/>
+              <a:t>Random Search (5 combinations x model)</a:t>
+            </a:r>
           </a:p>
         </p:txBody>
       </p:sp>
@@ -13758,6 +13266,17 @@
               <a:buNone/>
             </a:pPr>
             <a:r>
+              <a:rPr lang="en-US" sz="950" i="1" dirty="0" err="1">
+                <a:solidFill>
+                  <a:srgbClr val="4A6587"/>
+                </a:solidFill>
+                <a:latin typeface="Calibri" pitchFamily="34" charset="0"/>
+                <a:ea typeface="Calibri" pitchFamily="34" charset="-122"/>
+                <a:cs typeface="Calibri" pitchFamily="34" charset="-120"/>
+              </a:rPr>
+              <a:t>n_estimators</a:t>
+            </a:r>
+            <a:r>
               <a:rPr lang="en-US" sz="950" i="1" dirty="0">
                 <a:solidFill>
                   <a:srgbClr val="4A6587"/>
@@ -13766,9 +13285,52 @@
                 <a:ea typeface="Calibri" pitchFamily="34" charset="-122"/>
                 <a:cs typeface="Calibri" pitchFamily="34" charset="-120"/>
               </a:rPr>
-              <a:t>[key hyperparameters and ranges]</a:t>
-            </a:r>
-            <a:endParaRPr lang="en-US" sz="950" dirty="0"/>
+              <a:t>: {50,100,150} · </a:t>
+            </a:r>
+            <a:r>
+              <a:rPr lang="en-US" sz="950" i="1" dirty="0" err="1">
+                <a:solidFill>
+                  <a:srgbClr val="4A6587"/>
+                </a:solidFill>
+                <a:latin typeface="Calibri" pitchFamily="34" charset="0"/>
+                <a:ea typeface="Calibri" pitchFamily="34" charset="-122"/>
+                <a:cs typeface="Calibri" pitchFamily="34" charset="-120"/>
+              </a:rPr>
+              <a:t>learning_rate</a:t>
+            </a:r>
+            <a:r>
+              <a:rPr lang="en-US" sz="950" i="1" dirty="0">
+                <a:solidFill>
+                  <a:srgbClr val="4A6587"/>
+                </a:solidFill>
+                <a:latin typeface="Calibri" pitchFamily="34" charset="0"/>
+                <a:ea typeface="Calibri" pitchFamily="34" charset="-122"/>
+                <a:cs typeface="Calibri" pitchFamily="34" charset="-120"/>
+              </a:rPr>
+              <a:t>: {0.05, 0.1} · </a:t>
+            </a:r>
+            <a:r>
+              <a:rPr lang="en-US" sz="950" i="1" dirty="0" err="1">
+                <a:solidFill>
+                  <a:srgbClr val="4A6587"/>
+                </a:solidFill>
+                <a:latin typeface="Calibri" pitchFamily="34" charset="0"/>
+                <a:ea typeface="Calibri" pitchFamily="34" charset="-122"/>
+                <a:cs typeface="Calibri" pitchFamily="34" charset="-120"/>
+              </a:rPr>
+              <a:t>num_leaves</a:t>
+            </a:r>
+            <a:r>
+              <a:rPr lang="en-US" sz="950" i="1" dirty="0">
+                <a:solidFill>
+                  <a:srgbClr val="4A6587"/>
+                </a:solidFill>
+                <a:latin typeface="Calibri" pitchFamily="34" charset="0"/>
+                <a:ea typeface="Calibri" pitchFamily="34" charset="-122"/>
+                <a:cs typeface="Calibri" pitchFamily="34" charset="-120"/>
+              </a:rPr>
+              <a:t>: {15, 31}</a:t>
+            </a:r>
           </a:p>
         </p:txBody>
       </p:sp>
@@ -13864,9 +13426,17 @@
           <a:bodyPr wrap="square" lIns="0" tIns="0" rIns="0" bIns="0" rtlCol="0" anchor="ctr"/>
           <a:lstStyle/>
           <a:p>
-            <a:pPr marL="0" indent="0">
-              <a:buNone/>
-            </a:pPr>
+            <a:r>
+              <a:rPr lang="en-US" sz="950" i="1" dirty="0" err="1">
+                <a:solidFill>
+                  <a:srgbClr val="4A6587"/>
+                </a:solidFill>
+                <a:latin typeface="Calibri" pitchFamily="34" charset="0"/>
+                <a:ea typeface="Calibri" pitchFamily="34" charset="-122"/>
+                <a:cs typeface="Calibri" pitchFamily="34" charset="-120"/>
+              </a:rPr>
+              <a:t>n_estimators</a:t>
+            </a:r>
             <a:r>
               <a:rPr lang="en-US" sz="950" i="1" dirty="0">
                 <a:solidFill>
@@ -13876,9 +13446,52 @@
                 <a:ea typeface="Calibri" pitchFamily="34" charset="-122"/>
                 <a:cs typeface="Calibri" pitchFamily="34" charset="-120"/>
               </a:rPr>
-              <a:t>[final hyperparameter values]</a:t>
-            </a:r>
-            <a:endParaRPr lang="en-US" sz="950" dirty="0"/>
+              <a:t>: 100 · </a:t>
+            </a:r>
+            <a:r>
+              <a:rPr lang="en-US" sz="950" i="1" dirty="0" err="1">
+                <a:solidFill>
+                  <a:srgbClr val="4A6587"/>
+                </a:solidFill>
+                <a:latin typeface="Calibri" pitchFamily="34" charset="0"/>
+                <a:ea typeface="Calibri" pitchFamily="34" charset="-122"/>
+                <a:cs typeface="Calibri" pitchFamily="34" charset="-120"/>
+              </a:rPr>
+              <a:t>learning_rate</a:t>
+            </a:r>
+            <a:r>
+              <a:rPr lang="en-US" sz="950" i="1" dirty="0">
+                <a:solidFill>
+                  <a:srgbClr val="4A6587"/>
+                </a:solidFill>
+                <a:latin typeface="Calibri" pitchFamily="34" charset="0"/>
+                <a:ea typeface="Calibri" pitchFamily="34" charset="-122"/>
+                <a:cs typeface="Calibri" pitchFamily="34" charset="-120"/>
+              </a:rPr>
+              <a:t>: 0.1 · </a:t>
+            </a:r>
+            <a:r>
+              <a:rPr lang="en-US" sz="950" i="1" dirty="0" err="1">
+                <a:solidFill>
+                  <a:srgbClr val="4A6587"/>
+                </a:solidFill>
+                <a:latin typeface="Calibri" pitchFamily="34" charset="0"/>
+                <a:ea typeface="Calibri" pitchFamily="34" charset="-122"/>
+                <a:cs typeface="Calibri" pitchFamily="34" charset="-120"/>
+              </a:rPr>
+              <a:t>num_leaves</a:t>
+            </a:r>
+            <a:r>
+              <a:rPr lang="en-US" sz="950" i="1" dirty="0">
+                <a:solidFill>
+                  <a:srgbClr val="4A6587"/>
+                </a:solidFill>
+                <a:latin typeface="Calibri" pitchFamily="34" charset="0"/>
+                <a:ea typeface="Calibri" pitchFamily="34" charset="-122"/>
+                <a:cs typeface="Calibri" pitchFamily="34" charset="-120"/>
+              </a:rPr>
+              <a:t>: 31</a:t>
+            </a:r>
           </a:p>
         </p:txBody>
       </p:sp>
@@ -13978,6 +13591,17 @@
               <a:buNone/>
             </a:pPr>
             <a:r>
+              <a:rPr lang="en-US" sz="950" i="1" dirty="0" err="1">
+                <a:solidFill>
+                  <a:srgbClr val="4A6587"/>
+                </a:solidFill>
+                <a:latin typeface="Calibri" pitchFamily="34" charset="0"/>
+                <a:ea typeface="Calibri" pitchFamily="34" charset="-122"/>
+                <a:cs typeface="Calibri" pitchFamily="34" charset="-120"/>
+              </a:rPr>
+              <a:t>McNemar's</a:t>
+            </a:r>
+            <a:r>
               <a:rPr lang="en-US" sz="950" i="1" dirty="0">
                 <a:solidFill>
                   <a:srgbClr val="4A6587"/>
@@ -13986,9 +13610,8 @@
                 <a:ea typeface="Calibri" pitchFamily="34" charset="-122"/>
                 <a:cs typeface="Calibri" pitchFamily="34" charset="-120"/>
               </a:rPr>
-              <a:t>[test name, statistic, p-value]</a:t>
-            </a:r>
-            <a:endParaRPr lang="en-US" sz="950" dirty="0"/>
+              <a:t> test vs Linear SVM · χ²=14.25 · p=0.00016</a:t>
+            </a:r>
           </a:p>
         </p:txBody>
       </p:sp>
@@ -14014,7 +13637,7 @@
         </p:blipFill>
         <p:spPr>
           <a:xfrm>
-            <a:off x="450668" y="1167818"/>
+            <a:off x="450668" y="1161288"/>
             <a:ext cx="3990703" cy="2394421"/>
           </a:xfrm>
           <a:prstGeom prst="rect">
